--- a/SEM_8/FRP/FRP Mid Term.pptx
+++ b/SEM_8/FRP/FRP Mid Term.pptx
@@ -20673,9 +20673,9 @@
           </a:bodyPr>
           <a:lstStyle/>
           <a:p>
-            <a:pPr indent="0" lvl="0" marL="0" marR="0" rtl="0" algn="just">
+            <a:pPr indent="-304800" lvl="0" marL="457200" rtl="0" algn="l">
               <a:lnSpc>
-                <a:spcPct val="100000"/>
+                <a:spcPct val="115000"/>
               </a:lnSpc>
               <a:spcBef>
                 <a:spcPts val="0"/>
@@ -20688,7 +20688,7 @@
               </a:buClr>
               <a:buSzPts val="1200"/>
               <a:buFont typeface="Times New Roman"/>
-              <a:buNone/>
+              <a:buAutoNum type="arabicPeriod"/>
             </a:pPr>
             <a:r>
               <a:rPr lang="en" sz="1200">
@@ -20700,7 +20700,7 @@
                 <a:cs typeface="Times New Roman"/>
                 <a:sym typeface="Times New Roman"/>
               </a:rPr>
-              <a:t>[1] G. D. Apostolidis, I. Kalouptsoglou, M. Siavvas, D. Kehagias, and D. Tzovaras, "AI-Enhanced Static Analysis: Reducing False Alarms Using Large Language Models," in 2025 IEEE International Conference on Smart Computing (SMARTCOMP), 2025.</a:t>
+              <a:t>Schwarz, D. (2025) 'Countermind: A Multi-Layered Security Architecture for Large Language Models', arXiv preprint arXiv:2510.11837v1.</a:t>
             </a:r>
             <a:endParaRPr sz="1200">
               <a:solidFill>
@@ -20713,12 +20713,12 @@
             </a:endParaRPr>
           </a:p>
           <a:p>
-            <a:pPr indent="0" lvl="0" marL="0" marR="0" rtl="0" algn="just">
+            <a:pPr indent="-304800" lvl="0" marL="457200" rtl="0" algn="l">
               <a:lnSpc>
-                <a:spcPct val="100000"/>
+                <a:spcPct val="115000"/>
               </a:lnSpc>
               <a:spcBef>
-                <a:spcPts val="800"/>
+                <a:spcPts val="0"/>
               </a:spcBef>
               <a:spcAft>
                 <a:spcPts val="0"/>
@@ -20728,7 +20728,7 @@
               </a:buClr>
               <a:buSzPts val="1200"/>
               <a:buFont typeface="Times New Roman"/>
-              <a:buNone/>
+              <a:buAutoNum type="arabicPeriod"/>
             </a:pPr>
             <a:r>
               <a:rPr lang="en" sz="1200">
@@ -20740,7 +20740,7 @@
                 <a:cs typeface="Times New Roman"/>
                 <a:sym typeface="Times New Roman"/>
               </a:rPr>
-              <a:t>[2] S. Jin, "Large Language Models for Vulnerability Detection in Static Code Analysis: A Survey," in 2025 8th International Conference on Artificial Intelligence and Big Data (ICAIBD), 2025.</a:t>
+              <a:t>Li, J. et al. (2025) 'Steering Large Language Models for Vulnerability Detection', 2025 IEEE International Conference on Acoustics, Speech and Signal Processing (ICASSP).</a:t>
             </a:r>
             <a:endParaRPr sz="1200">
               <a:solidFill>
@@ -20753,12 +20753,12 @@
             </a:endParaRPr>
           </a:p>
           <a:p>
-            <a:pPr indent="0" lvl="0" marL="0" marR="0" rtl="0" algn="just">
+            <a:pPr indent="-304800" lvl="0" marL="457200" rtl="0" algn="l">
               <a:lnSpc>
-                <a:spcPct val="100000"/>
+                <a:spcPct val="115000"/>
               </a:lnSpc>
               <a:spcBef>
-                <a:spcPts val="800"/>
+                <a:spcPts val="0"/>
               </a:spcBef>
               <a:spcAft>
                 <a:spcPts val="0"/>
@@ -20768,7 +20768,7 @@
               </a:buClr>
               <a:buSzPts val="1200"/>
               <a:buFont typeface="Times New Roman"/>
-              <a:buNone/>
+              <a:buAutoNum type="arabicPeriod"/>
             </a:pPr>
             <a:r>
               <a:rPr lang="en" sz="1200">
@@ -20780,7 +20780,7 @@
                 <a:cs typeface="Times New Roman"/>
                 <a:sym typeface="Times New Roman"/>
               </a:rPr>
-              <a:t>[3] K. Dozono, J. Engesser, B. Hummelt, T. Roehm, and A. Pretschner, "Should We Evaluate LLM Based Security Analysis Approaches on Open Source Systems?," in 2025 40th IEEE/ACM International Conference on Automated Software Engineering (ASE), 2025.</a:t>
+              <a:t>Kim, M., Caccia, L., Shi, Z., Pereira, M., Côté, M.-A., Yuan, X., and Sordoni, A. (2025) 'Learning to Extract Context for Context-Aware LLM Inference', Microsoft Research.</a:t>
             </a:r>
             <a:endParaRPr sz="1200">
               <a:solidFill>
@@ -20793,12 +20793,12 @@
             </a:endParaRPr>
           </a:p>
           <a:p>
-            <a:pPr indent="0" lvl="0" marL="0" marR="0" rtl="0" algn="just">
+            <a:pPr indent="-304800" lvl="0" marL="457200" rtl="0" algn="l">
               <a:lnSpc>
-                <a:spcPct val="100000"/>
+                <a:spcPct val="115000"/>
               </a:lnSpc>
               <a:spcBef>
-                <a:spcPts val="800"/>
+                <a:spcPts val="0"/>
               </a:spcBef>
               <a:spcAft>
                 <a:spcPts val="0"/>
@@ -20808,7 +20808,7 @@
               </a:buClr>
               <a:buSzPts val="1200"/>
               <a:buFont typeface="Times New Roman"/>
-              <a:buNone/>
+              <a:buAutoNum type="arabicPeriod"/>
             </a:pPr>
             <a:r>
               <a:rPr lang="en" sz="1200">
@@ -20820,7 +20820,7 @@
                 <a:cs typeface="Times New Roman"/>
                 <a:sym typeface="Times New Roman"/>
               </a:rPr>
-              <a:t>[4] Z. Guo et al., "Mitigating False Positive Static Analysis Warnings: Progress, Challenges, and Opportunities," IEEE Transactions on Software Engineering, vol. 49, no. 12, pp. 5154-5186, Dec. 2023.</a:t>
+              <a:t>Jin, S. (2025) 'Large Language Models for Vulnerability Detection in Static Code Analysis: A Survey', 2025 8th International Conference on Artificial Intelligence and Big Data (ICAIBD).</a:t>
             </a:r>
             <a:endParaRPr sz="1200">
               <a:solidFill>
@@ -20833,12 +20833,12 @@
             </a:endParaRPr>
           </a:p>
           <a:p>
-            <a:pPr indent="0" lvl="0" marL="0" marR="0" rtl="0" algn="just">
+            <a:pPr indent="-304800" lvl="0" marL="457200" rtl="0" algn="l">
               <a:lnSpc>
-                <a:spcPct val="100000"/>
+                <a:spcPct val="115000"/>
               </a:lnSpc>
               <a:spcBef>
-                <a:spcPts val="800"/>
+                <a:spcPts val="0"/>
               </a:spcBef>
               <a:spcAft>
                 <a:spcPts val="0"/>
@@ -20848,7 +20848,7 @@
               </a:buClr>
               <a:buSzPts val="1200"/>
               <a:buFont typeface="Times New Roman"/>
-              <a:buNone/>
+              <a:buAutoNum type="arabicPeriod"/>
             </a:pPr>
             <a:r>
               <a:rPr lang="en" sz="1200">
@@ -20860,7 +20860,7 @@
                 <a:cs typeface="Times New Roman"/>
                 <a:sym typeface="Times New Roman"/>
               </a:rPr>
-              <a:t>[5] J. Li et al., "Steering Large Language Models for Vulnerability Detection," in 2025 IEEE International Conference on Acoustics, Speech and Signal Processing (ICASSP), 2025.</a:t>
+              <a:t>Dozono, K., Engesser, J., Hummelt, B., Roehm, T., and Pretschner, A. (2025) 'Should We Evaluate LLM Based Security Analysis Approaches on Open Source Systems?', 2025 40th IEEE/ACM International Conference on Automated Software Engineering (ASE).</a:t>
             </a:r>
             <a:endParaRPr sz="1200">
               <a:solidFill>
@@ -20873,12 +20873,12 @@
             </a:endParaRPr>
           </a:p>
           <a:p>
-            <a:pPr indent="0" lvl="0" marL="0" marR="0" rtl="0" algn="just">
+            <a:pPr indent="-304800" lvl="0" marL="457200" rtl="0" algn="l">
               <a:lnSpc>
-                <a:spcPct val="100000"/>
+                <a:spcPct val="115000"/>
               </a:lnSpc>
               <a:spcBef>
-                <a:spcPts val="800"/>
+                <a:spcPts val="0"/>
               </a:spcBef>
               <a:spcAft>
                 <a:spcPts val="0"/>
@@ -20888,7 +20888,7 @@
               </a:buClr>
               <a:buSzPts val="1200"/>
               <a:buFont typeface="Times New Roman"/>
-              <a:buNone/>
+              <a:buAutoNum type="arabicPeriod"/>
             </a:pPr>
             <a:r>
               <a:rPr lang="en" sz="1200">
@@ -20900,7 +20900,7 @@
                 <a:cs typeface="Times New Roman"/>
                 <a:sym typeface="Times New Roman"/>
               </a:rPr>
-              <a:t>[6] T. Muske and U. P. Khedker, "Efficient Elimination of False Positives using Static Analysis," in 2015 IEEE, 2015.</a:t>
+              <a:t>Apostolidis, G. D., Kalouptsoglou, I., Siavvas, M., Kehagias, D., and Tzovaras, D. (2025) 'AI-Enhanced Static Analysis: Reducing False Alarms Using Large Language Models', 2025 IEEE International Conference on Smart Computing (SMARTCOMP).</a:t>
             </a:r>
             <a:endParaRPr sz="1200">
               <a:solidFill>
@@ -20913,12 +20913,12 @@
             </a:endParaRPr>
           </a:p>
           <a:p>
-            <a:pPr indent="0" lvl="0" marL="0" marR="0" rtl="0" algn="just">
+            <a:pPr indent="-304800" lvl="0" marL="457200" rtl="0" algn="l">
               <a:lnSpc>
-                <a:spcPct val="100000"/>
+                <a:spcPct val="115000"/>
               </a:lnSpc>
               <a:spcBef>
-                <a:spcPts val="800"/>
+                <a:spcPts val="0"/>
               </a:spcBef>
               <a:spcAft>
                 <a:spcPts val="0"/>
@@ -20928,7 +20928,7 @@
               </a:buClr>
               <a:buSzPts val="1200"/>
               <a:buFont typeface="Times New Roman"/>
-              <a:buNone/>
+              <a:buAutoNum type="arabicPeriod"/>
             </a:pPr>
             <a:r>
               <a:rPr lang="en" sz="1200">
@@ -20940,7 +20940,7 @@
                 <a:cs typeface="Times New Roman"/>
                 <a:sym typeface="Times New Roman"/>
               </a:rPr>
-              <a:t>[7] M. Kim, L. Caccia, Z. Shi, M. Pereira, M.-A. Côté, X. Yuan, and A. Sordoni, "Learning to Extract Context for Context-Aware LLM Inference," Microsoft Research, 2025.</a:t>
+              <a:t>Guo, Z. et al. (2023) 'Mitigating False Positive Static Analysis Warnings: Progress, Challenges, and Opportunities', IEEE Transactions on Software Engineering, Vol. 49, No. 12, pp. 5154-5186.</a:t>
             </a:r>
             <a:endParaRPr sz="1200">
               <a:solidFill>
@@ -20953,17 +20953,22 @@
             </a:endParaRPr>
           </a:p>
           <a:p>
-            <a:pPr indent="0" lvl="0" marL="0" marR="0" rtl="0" algn="just">
+            <a:pPr indent="-304800" lvl="0" marL="457200" rtl="0" algn="l">
               <a:lnSpc>
-                <a:spcPct val="100000"/>
+                <a:spcPct val="115000"/>
               </a:lnSpc>
               <a:spcBef>
-                <a:spcPts val="800"/>
-              </a:spcBef>
-              <a:spcAft>
-                <a:spcPts val="0"/>
-              </a:spcAft>
-              <a:buNone/>
+                <a:spcPts val="0"/>
+              </a:spcBef>
+              <a:spcAft>
+                <a:spcPts val="0"/>
+              </a:spcAft>
+              <a:buClr>
+                <a:schemeClr val="dk1"/>
+              </a:buClr>
+              <a:buSzPts val="1200"/>
+              <a:buFont typeface="Times New Roman"/>
+              <a:buAutoNum type="arabicPeriod"/>
             </a:pPr>
             <a:r>
               <a:rPr lang="en" sz="1200">
@@ -20975,7 +20980,7 @@
                 <a:cs typeface="Times New Roman"/>
                 <a:sym typeface="Times New Roman"/>
               </a:rPr>
-              <a:t>[8] D. Schwarz, "Countermind: A Multi-Layered Security Architecture for Large Language Models," arXiv preprint arXiv:2510.11837v1, Oct. 2025.</a:t>
+              <a:t>Muske, T. and Khedker, U. P. (2015) 'Efficient Elimination of False Positives using Static Analysis', 2015 IEEE.</a:t>
             </a:r>
             <a:endParaRPr sz="1200">
               <a:solidFill>
@@ -22938,7 +22943,7 @@
             <a:tbl>
               <a:tblPr bandRow="1" firstRow="1">
                 <a:noFill/>
-                <a:tableStyleId>{63AFD72F-D83C-49CB-ACC5-6D9350BFB6BF}</a:tableStyleId>
+                <a:tableStyleId>{6D9ABEBF-9BBF-4B88-B93A-B9F46CAE2BA6}</a:tableStyleId>
               </a:tblPr>
               <a:tblGrid>
                 <a:gridCol w="872025"/>
@@ -22961,7 +22966,7 @@
                           <a:spcPts val="0"/>
                         </a:spcAft>
                         <a:buClr>
-                          <a:schemeClr val="dk1"/>
+                          <a:srgbClr val="000000"/>
                         </a:buClr>
                         <a:buSzPts val="1400"/>
                         <a:buFont typeface="Times New Roman"/>
@@ -22984,7 +22989,44 @@
                       </a:endParaRPr>
                     </a:p>
                   </a:txBody>
-                  <a:tcPr marT="45725" marB="45725" marR="91450" marL="91450"/>
+                  <a:tcPr marT="45725" marB="45725" marR="91450" marL="91450">
+                    <a:lnL cap="flat" cmpd="sng" w="12700">
+                      <a:solidFill>
+                        <a:srgbClr val="FFFFFF"/>
+                      </a:solidFill>
+                      <a:prstDash val="solid"/>
+                      <a:round/>
+                      <a:headEnd len="sm" w="sm" type="none"/>
+                      <a:tailEnd len="sm" w="sm" type="none"/>
+                    </a:lnL>
+                    <a:lnR cap="flat" cmpd="sng" w="12700">
+                      <a:solidFill>
+                        <a:srgbClr val="FFFFFF"/>
+                      </a:solidFill>
+                      <a:prstDash val="solid"/>
+                      <a:round/>
+                      <a:headEnd len="sm" w="sm" type="none"/>
+                      <a:tailEnd len="sm" w="sm" type="none"/>
+                    </a:lnR>
+                    <a:lnT cap="flat" cmpd="sng" w="12700">
+                      <a:solidFill>
+                        <a:srgbClr val="FFFFFF"/>
+                      </a:solidFill>
+                      <a:prstDash val="solid"/>
+                      <a:round/>
+                      <a:headEnd len="sm" w="sm" type="none"/>
+                      <a:tailEnd len="sm" w="sm" type="none"/>
+                    </a:lnT>
+                    <a:lnB cap="flat" cmpd="sng" w="12700">
+                      <a:solidFill>
+                        <a:srgbClr val="FFFFFF"/>
+                      </a:solidFill>
+                      <a:prstDash val="solid"/>
+                      <a:round/>
+                      <a:headEnd len="sm" w="sm" type="none"/>
+                      <a:tailEnd len="sm" w="sm" type="none"/>
+                    </a:lnB>
+                  </a:tcPr>
                 </a:tc>
                 <a:tc>
                   <a:txBody>
@@ -22999,7 +23041,7 @@
                           <a:spcPts val="0"/>
                         </a:spcAft>
                         <a:buClr>
-                          <a:schemeClr val="dk1"/>
+                          <a:srgbClr val="000000"/>
                         </a:buClr>
                         <a:buSzPts val="1400"/>
                         <a:buFont typeface="Times New Roman"/>
@@ -23030,7 +23072,7 @@
                           <a:spcPts val="0"/>
                         </a:spcAft>
                         <a:buClr>
-                          <a:schemeClr val="dk1"/>
+                          <a:srgbClr val="000000"/>
                         </a:buClr>
                         <a:buSzPts val="1400"/>
                         <a:buFont typeface="Times New Roman"/>
@@ -23053,7 +23095,44 @@
                       </a:endParaRPr>
                     </a:p>
                   </a:txBody>
-                  <a:tcPr marT="45725" marB="45725" marR="91450" marL="91450"/>
+                  <a:tcPr marT="45725" marB="45725" marR="91450" marL="91450">
+                    <a:lnL cap="flat" cmpd="sng" w="12700">
+                      <a:solidFill>
+                        <a:srgbClr val="FFFFFF"/>
+                      </a:solidFill>
+                      <a:prstDash val="solid"/>
+                      <a:round/>
+                      <a:headEnd len="sm" w="sm" type="none"/>
+                      <a:tailEnd len="sm" w="sm" type="none"/>
+                    </a:lnL>
+                    <a:lnR cap="flat" cmpd="sng" w="12700">
+                      <a:solidFill>
+                        <a:srgbClr val="FFFFFF"/>
+                      </a:solidFill>
+                      <a:prstDash val="solid"/>
+                      <a:round/>
+                      <a:headEnd len="sm" w="sm" type="none"/>
+                      <a:tailEnd len="sm" w="sm" type="none"/>
+                    </a:lnR>
+                    <a:lnT cap="flat" cmpd="sng" w="12700">
+                      <a:solidFill>
+                        <a:srgbClr val="FFFFFF"/>
+                      </a:solidFill>
+                      <a:prstDash val="solid"/>
+                      <a:round/>
+                      <a:headEnd len="sm" w="sm" type="none"/>
+                      <a:tailEnd len="sm" w="sm" type="none"/>
+                    </a:lnT>
+                    <a:lnB cap="flat" cmpd="sng" w="12700">
+                      <a:solidFill>
+                        <a:srgbClr val="FFFFFF"/>
+                      </a:solidFill>
+                      <a:prstDash val="solid"/>
+                      <a:round/>
+                      <a:headEnd len="sm" w="sm" type="none"/>
+                      <a:tailEnd len="sm" w="sm" type="none"/>
+                    </a:lnB>
+                  </a:tcPr>
                 </a:tc>
                 <a:tc>
                   <a:txBody>
@@ -23068,7 +23147,7 @@
                           <a:spcPts val="0"/>
                         </a:spcAft>
                         <a:buClr>
-                          <a:schemeClr val="dk1"/>
+                          <a:srgbClr val="000000"/>
                         </a:buClr>
                         <a:buSzPts val="1400"/>
                         <a:buFont typeface="Times New Roman"/>
@@ -23091,7 +23170,44 @@
                       </a:endParaRPr>
                     </a:p>
                   </a:txBody>
-                  <a:tcPr marT="45725" marB="45725" marR="91450" marL="91450"/>
+                  <a:tcPr marT="45725" marB="45725" marR="91450" marL="91450">
+                    <a:lnL cap="flat" cmpd="sng" w="12700">
+                      <a:solidFill>
+                        <a:srgbClr val="FFFFFF"/>
+                      </a:solidFill>
+                      <a:prstDash val="solid"/>
+                      <a:round/>
+                      <a:headEnd len="sm" w="sm" type="none"/>
+                      <a:tailEnd len="sm" w="sm" type="none"/>
+                    </a:lnL>
+                    <a:lnR cap="flat" cmpd="sng" w="12700">
+                      <a:solidFill>
+                        <a:srgbClr val="FFFFFF"/>
+                      </a:solidFill>
+                      <a:prstDash val="solid"/>
+                      <a:round/>
+                      <a:headEnd len="sm" w="sm" type="none"/>
+                      <a:tailEnd len="sm" w="sm" type="none"/>
+                    </a:lnR>
+                    <a:lnT cap="flat" cmpd="sng" w="12700">
+                      <a:solidFill>
+                        <a:srgbClr val="FFFFFF"/>
+                      </a:solidFill>
+                      <a:prstDash val="solid"/>
+                      <a:round/>
+                      <a:headEnd len="sm" w="sm" type="none"/>
+                      <a:tailEnd len="sm" w="sm" type="none"/>
+                    </a:lnT>
+                    <a:lnB cap="flat" cmpd="sng" w="12700">
+                      <a:solidFill>
+                        <a:srgbClr val="FFFFFF"/>
+                      </a:solidFill>
+                      <a:prstDash val="solid"/>
+                      <a:round/>
+                      <a:headEnd len="sm" w="sm" type="none"/>
+                      <a:tailEnd len="sm" w="sm" type="none"/>
+                    </a:lnB>
+                  </a:tcPr>
                 </a:tc>
                 <a:tc>
                   <a:txBody>
@@ -23106,7 +23222,7 @@
                           <a:spcPts val="0"/>
                         </a:spcAft>
                         <a:buClr>
-                          <a:schemeClr val="dk1"/>
+                          <a:srgbClr val="000000"/>
                         </a:buClr>
                         <a:buSzPts val="1400"/>
                         <a:buFont typeface="Times New Roman"/>
@@ -23129,7 +23245,44 @@
                       </a:endParaRPr>
                     </a:p>
                   </a:txBody>
-                  <a:tcPr marT="45725" marB="45725" marR="91450" marL="91450"/>
+                  <a:tcPr marT="45725" marB="45725" marR="91450" marL="91450">
+                    <a:lnL cap="flat" cmpd="sng" w="12700">
+                      <a:solidFill>
+                        <a:srgbClr val="FFFFFF"/>
+                      </a:solidFill>
+                      <a:prstDash val="solid"/>
+                      <a:round/>
+                      <a:headEnd len="sm" w="sm" type="none"/>
+                      <a:tailEnd len="sm" w="sm" type="none"/>
+                    </a:lnL>
+                    <a:lnR cap="flat" cmpd="sng" w="12700">
+                      <a:solidFill>
+                        <a:srgbClr val="FFFFFF"/>
+                      </a:solidFill>
+                      <a:prstDash val="solid"/>
+                      <a:round/>
+                      <a:headEnd len="sm" w="sm" type="none"/>
+                      <a:tailEnd len="sm" w="sm" type="none"/>
+                    </a:lnR>
+                    <a:lnT cap="flat" cmpd="sng" w="12700">
+                      <a:solidFill>
+                        <a:srgbClr val="FFFFFF"/>
+                      </a:solidFill>
+                      <a:prstDash val="solid"/>
+                      <a:round/>
+                      <a:headEnd len="sm" w="sm" type="none"/>
+                      <a:tailEnd len="sm" w="sm" type="none"/>
+                    </a:lnT>
+                    <a:lnB cap="flat" cmpd="sng" w="12700">
+                      <a:solidFill>
+                        <a:srgbClr val="FFFFFF"/>
+                      </a:solidFill>
+                      <a:prstDash val="solid"/>
+                      <a:round/>
+                      <a:headEnd len="sm" w="sm" type="none"/>
+                      <a:tailEnd len="sm" w="sm" type="none"/>
+                    </a:lnB>
+                  </a:tcPr>
                 </a:tc>
                 <a:tc>
                   <a:txBody>
@@ -23144,7 +23297,7 @@
                           <a:spcPts val="0"/>
                         </a:spcAft>
                         <a:buClr>
-                          <a:schemeClr val="dk1"/>
+                          <a:srgbClr val="000000"/>
                         </a:buClr>
                         <a:buSzPts val="1400"/>
                         <a:buFont typeface="Times New Roman"/>
@@ -23167,7 +23320,44 @@
                       </a:endParaRPr>
                     </a:p>
                   </a:txBody>
-                  <a:tcPr marT="45725" marB="45725" marR="91450" marL="91450"/>
+                  <a:tcPr marT="45725" marB="45725" marR="91450" marL="91450">
+                    <a:lnL cap="flat" cmpd="sng" w="12700">
+                      <a:solidFill>
+                        <a:srgbClr val="FFFFFF"/>
+                      </a:solidFill>
+                      <a:prstDash val="solid"/>
+                      <a:round/>
+                      <a:headEnd len="sm" w="sm" type="none"/>
+                      <a:tailEnd len="sm" w="sm" type="none"/>
+                    </a:lnL>
+                    <a:lnR cap="flat" cmpd="sng" w="12700">
+                      <a:solidFill>
+                        <a:srgbClr val="FFFFFF"/>
+                      </a:solidFill>
+                      <a:prstDash val="solid"/>
+                      <a:round/>
+                      <a:headEnd len="sm" w="sm" type="none"/>
+                      <a:tailEnd len="sm" w="sm" type="none"/>
+                    </a:lnR>
+                    <a:lnT cap="flat" cmpd="sng" w="12700">
+                      <a:solidFill>
+                        <a:srgbClr val="FFFFFF"/>
+                      </a:solidFill>
+                      <a:prstDash val="solid"/>
+                      <a:round/>
+                      <a:headEnd len="sm" w="sm" type="none"/>
+                      <a:tailEnd len="sm" w="sm" type="none"/>
+                    </a:lnT>
+                    <a:lnB cap="flat" cmpd="sng" w="12700">
+                      <a:solidFill>
+                        <a:srgbClr val="FFFFFF"/>
+                      </a:solidFill>
+                      <a:prstDash val="solid"/>
+                      <a:round/>
+                      <a:headEnd len="sm" w="sm" type="none"/>
+                      <a:tailEnd len="sm" w="sm" type="none"/>
+                    </a:lnB>
+                  </a:tcPr>
                 </a:tc>
               </a:tr>
               <a:tr h="751200">
@@ -23184,7 +23374,7 @@
                           <a:spcPts val="0"/>
                         </a:spcAft>
                         <a:buClr>
-                          <a:schemeClr val="dk1"/>
+                          <a:srgbClr val="000000"/>
                         </a:buClr>
                         <a:buSzPts val="1000"/>
                         <a:buFont typeface="Times New Roman"/>
@@ -23197,7 +23387,7 @@
                           <a:cs typeface="Times New Roman"/>
                           <a:sym typeface="Times New Roman"/>
                         </a:rPr>
-                        <a:t>Apostolidis et al. (2025)</a:t>
+                        <a:t>Schwarz (2025)</a:t>
                       </a:r>
                       <a:endParaRPr b="0" sz="1000" u="none" cap="none" strike="noStrike">
                         <a:latin typeface="Times New Roman"/>
@@ -23207,7 +23397,44 @@
                       </a:endParaRPr>
                     </a:p>
                   </a:txBody>
-                  <a:tcPr marT="45725" marB="45725" marR="91450" marL="91450"/>
+                  <a:tcPr marT="45725" marB="45725" marR="91450" marL="91450">
+                    <a:lnL cap="flat" cmpd="sng" w="12700">
+                      <a:solidFill>
+                        <a:srgbClr val="FFFFFF"/>
+                      </a:solidFill>
+                      <a:prstDash val="solid"/>
+                      <a:round/>
+                      <a:headEnd len="sm" w="sm" type="none"/>
+                      <a:tailEnd len="sm" w="sm" type="none"/>
+                    </a:lnL>
+                    <a:lnR cap="flat" cmpd="sng" w="12700">
+                      <a:solidFill>
+                        <a:srgbClr val="FFFFFF"/>
+                      </a:solidFill>
+                      <a:prstDash val="solid"/>
+                      <a:round/>
+                      <a:headEnd len="sm" w="sm" type="none"/>
+                      <a:tailEnd len="sm" w="sm" type="none"/>
+                    </a:lnR>
+                    <a:lnT cap="flat" cmpd="sng" w="12700">
+                      <a:solidFill>
+                        <a:srgbClr val="FFFFFF"/>
+                      </a:solidFill>
+                      <a:prstDash val="solid"/>
+                      <a:round/>
+                      <a:headEnd len="sm" w="sm" type="none"/>
+                      <a:tailEnd len="sm" w="sm" type="none"/>
+                    </a:lnT>
+                    <a:lnB cap="flat" cmpd="sng" w="12700">
+                      <a:solidFill>
+                        <a:srgbClr val="FFFFFF"/>
+                      </a:solidFill>
+                      <a:prstDash val="solid"/>
+                      <a:round/>
+                      <a:headEnd len="sm" w="sm" type="none"/>
+                      <a:tailEnd len="sm" w="sm" type="none"/>
+                    </a:lnB>
+                  </a:tcPr>
                 </a:tc>
                 <a:tc>
                   <a:txBody>
@@ -23222,7 +23449,7 @@
                           <a:spcPts val="0"/>
                         </a:spcAft>
                         <a:buClr>
-                          <a:schemeClr val="dk1"/>
+                          <a:srgbClr val="000000"/>
                         </a:buClr>
                         <a:buSzPts val="1000"/>
                         <a:buFont typeface="Times New Roman"/>
@@ -23235,7 +23462,7 @@
                           <a:cs typeface="Times New Roman"/>
                           <a:sym typeface="Times New Roman"/>
                         </a:rPr>
-                        <a:t>CppCheck static analysis filtered by a fine-tuned CodeBERT vulnerability prediction model.</a:t>
+                        <a:t>"Countermind" multi-layered security architecture using Semantic Boundary Logic (SBL) and Parameter-Space Restriction (PSR).</a:t>
                       </a:r>
                       <a:endParaRPr b="0" sz="1000" u="none" cap="none" strike="noStrike">
                         <a:latin typeface="Times New Roman"/>
@@ -23245,7 +23472,44 @@
                       </a:endParaRPr>
                     </a:p>
                   </a:txBody>
-                  <a:tcPr marT="45725" marB="45725" marR="91450" marL="91450"/>
+                  <a:tcPr marT="45725" marB="45725" marR="91450" marL="91450">
+                    <a:lnL cap="flat" cmpd="sng" w="12700">
+                      <a:solidFill>
+                        <a:srgbClr val="FFFFFF"/>
+                      </a:solidFill>
+                      <a:prstDash val="solid"/>
+                      <a:round/>
+                      <a:headEnd len="sm" w="sm" type="none"/>
+                      <a:tailEnd len="sm" w="sm" type="none"/>
+                    </a:lnL>
+                    <a:lnR cap="flat" cmpd="sng" w="12700">
+                      <a:solidFill>
+                        <a:srgbClr val="FFFFFF"/>
+                      </a:solidFill>
+                      <a:prstDash val="solid"/>
+                      <a:round/>
+                      <a:headEnd len="sm" w="sm" type="none"/>
+                      <a:tailEnd len="sm" w="sm" type="none"/>
+                    </a:lnR>
+                    <a:lnT cap="flat" cmpd="sng" w="12700">
+                      <a:solidFill>
+                        <a:srgbClr val="FFFFFF"/>
+                      </a:solidFill>
+                      <a:prstDash val="solid"/>
+                      <a:round/>
+                      <a:headEnd len="sm" w="sm" type="none"/>
+                      <a:tailEnd len="sm" w="sm" type="none"/>
+                    </a:lnT>
+                    <a:lnB cap="flat" cmpd="sng" w="12700">
+                      <a:solidFill>
+                        <a:srgbClr val="FFFFFF"/>
+                      </a:solidFill>
+                      <a:prstDash val="solid"/>
+                      <a:round/>
+                      <a:headEnd len="sm" w="sm" type="none"/>
+                      <a:tailEnd len="sm" w="sm" type="none"/>
+                    </a:lnB>
+                  </a:tcPr>
                 </a:tc>
                 <a:tc>
                   <a:txBody>
@@ -23260,7 +23524,7 @@
                           <a:spcPts val="0"/>
                         </a:spcAft>
                         <a:buClr>
-                          <a:schemeClr val="dk1"/>
+                          <a:srgbClr val="000000"/>
                         </a:buClr>
                         <a:buSzPts val="1000"/>
                         <a:buFont typeface="Times New Roman"/>
@@ -23273,7 +23537,7 @@
                           <a:cs typeface="Times New Roman"/>
                           <a:sym typeface="Times New Roman"/>
                         </a:rPr>
-                        <a:t>Big-Vul and ReVeal (C/C++ GitHub samples).</a:t>
+                        <a:t>N/A (Conceptual/Architectural design).</a:t>
                       </a:r>
                       <a:endParaRPr b="0" sz="1000" u="none" cap="none" strike="noStrike">
                         <a:latin typeface="Times New Roman"/>
@@ -23283,7 +23547,44 @@
                       </a:endParaRPr>
                     </a:p>
                   </a:txBody>
-                  <a:tcPr marT="45725" marB="45725" marR="91450" marL="91450"/>
+                  <a:tcPr marT="45725" marB="45725" marR="91450" marL="91450">
+                    <a:lnL cap="flat" cmpd="sng" w="12700">
+                      <a:solidFill>
+                        <a:srgbClr val="FFFFFF"/>
+                      </a:solidFill>
+                      <a:prstDash val="solid"/>
+                      <a:round/>
+                      <a:headEnd len="sm" w="sm" type="none"/>
+                      <a:tailEnd len="sm" w="sm" type="none"/>
+                    </a:lnL>
+                    <a:lnR cap="flat" cmpd="sng" w="12700">
+                      <a:solidFill>
+                        <a:srgbClr val="FFFFFF"/>
+                      </a:solidFill>
+                      <a:prstDash val="solid"/>
+                      <a:round/>
+                      <a:headEnd len="sm" w="sm" type="none"/>
+                      <a:tailEnd len="sm" w="sm" type="none"/>
+                    </a:lnR>
+                    <a:lnT cap="flat" cmpd="sng" w="12700">
+                      <a:solidFill>
+                        <a:srgbClr val="FFFFFF"/>
+                      </a:solidFill>
+                      <a:prstDash val="solid"/>
+                      <a:round/>
+                      <a:headEnd len="sm" w="sm" type="none"/>
+                      <a:tailEnd len="sm" w="sm" type="none"/>
+                    </a:lnT>
+                    <a:lnB cap="flat" cmpd="sng" w="12700">
+                      <a:solidFill>
+                        <a:srgbClr val="FFFFFF"/>
+                      </a:solidFill>
+                      <a:prstDash val="solid"/>
+                      <a:round/>
+                      <a:headEnd len="sm" w="sm" type="none"/>
+                      <a:tailEnd len="sm" w="sm" type="none"/>
+                    </a:lnB>
+                  </a:tcPr>
                 </a:tc>
                 <a:tc>
                   <a:txBody>
@@ -23298,7 +23599,7 @@
                           <a:spcPts val="0"/>
                         </a:spcAft>
                         <a:buClr>
-                          <a:schemeClr val="dk1"/>
+                          <a:srgbClr val="000000"/>
                         </a:buClr>
                         <a:buSzPts val="1000"/>
                         <a:buFont typeface="Times New Roman"/>
@@ -23311,7 +23612,7 @@
                           <a:cs typeface="Times New Roman"/>
                           <a:sym typeface="Times New Roman"/>
                         </a:rPr>
-                        <a:t>Reduced false positives, improving static analysis practicality with minimal impact on detection accuracy.</a:t>
+                        <a:t>Shifts LLM defenses from reactive post-hoc filtering to proactive pre-inference structural validation.</a:t>
                       </a:r>
                       <a:endParaRPr b="0" sz="1000" u="none" cap="none" strike="noStrike">
                         <a:latin typeface="Times New Roman"/>
@@ -23321,7 +23622,44 @@
                       </a:endParaRPr>
                     </a:p>
                   </a:txBody>
-                  <a:tcPr marT="45725" marB="45725" marR="91450" marL="91450"/>
+                  <a:tcPr marT="45725" marB="45725" marR="91450" marL="91450">
+                    <a:lnL cap="flat" cmpd="sng" w="12700">
+                      <a:solidFill>
+                        <a:srgbClr val="FFFFFF"/>
+                      </a:solidFill>
+                      <a:prstDash val="solid"/>
+                      <a:round/>
+                      <a:headEnd len="sm" w="sm" type="none"/>
+                      <a:tailEnd len="sm" w="sm" type="none"/>
+                    </a:lnL>
+                    <a:lnR cap="flat" cmpd="sng" w="12700">
+                      <a:solidFill>
+                        <a:srgbClr val="FFFFFF"/>
+                      </a:solidFill>
+                      <a:prstDash val="solid"/>
+                      <a:round/>
+                      <a:headEnd len="sm" w="sm" type="none"/>
+                      <a:tailEnd len="sm" w="sm" type="none"/>
+                    </a:lnR>
+                    <a:lnT cap="flat" cmpd="sng" w="12700">
+                      <a:solidFill>
+                        <a:srgbClr val="FFFFFF"/>
+                      </a:solidFill>
+                      <a:prstDash val="solid"/>
+                      <a:round/>
+                      <a:headEnd len="sm" w="sm" type="none"/>
+                      <a:tailEnd len="sm" w="sm" type="none"/>
+                    </a:lnT>
+                    <a:lnB cap="flat" cmpd="sng" w="12700">
+                      <a:solidFill>
+                        <a:srgbClr val="FFFFFF"/>
+                      </a:solidFill>
+                      <a:prstDash val="solid"/>
+                      <a:round/>
+                      <a:headEnd len="sm" w="sm" type="none"/>
+                      <a:tailEnd len="sm" w="sm" type="none"/>
+                    </a:lnB>
+                  </a:tcPr>
                 </a:tc>
                 <a:tc>
                   <a:txBody>
@@ -23336,7 +23674,7 @@
                           <a:spcPts val="0"/>
                         </a:spcAft>
                         <a:buClr>
-                          <a:schemeClr val="dk1"/>
+                          <a:srgbClr val="000000"/>
                         </a:buClr>
                         <a:buSzPts val="1000"/>
                         <a:buFont typeface="Times New Roman"/>
@@ -23349,7 +23687,7 @@
                           <a:cs typeface="Times New Roman"/>
                           <a:sym typeface="Times New Roman"/>
                         </a:rPr>
-                        <a:t>Vulnerability prediction models lack line-level granularity; static tools suffer from overwhelming false alarms.</a:t>
+                        <a:t>Post-hoc filters are brittle against prompt injections; models inherently struggle to distinguish trusted instructions from untrusted data.</a:t>
                       </a:r>
                       <a:endParaRPr b="0" sz="1000" u="none" cap="none" strike="noStrike">
                         <a:latin typeface="Times New Roman"/>
@@ -23359,7 +23697,44 @@
                       </a:endParaRPr>
                     </a:p>
                   </a:txBody>
-                  <a:tcPr marT="45725" marB="45725" marR="91450" marL="91450"/>
+                  <a:tcPr marT="45725" marB="45725" marR="91450" marL="91450">
+                    <a:lnL cap="flat" cmpd="sng" w="12700">
+                      <a:solidFill>
+                        <a:srgbClr val="FFFFFF"/>
+                      </a:solidFill>
+                      <a:prstDash val="solid"/>
+                      <a:round/>
+                      <a:headEnd len="sm" w="sm" type="none"/>
+                      <a:tailEnd len="sm" w="sm" type="none"/>
+                    </a:lnL>
+                    <a:lnR cap="flat" cmpd="sng" w="12700">
+                      <a:solidFill>
+                        <a:srgbClr val="FFFFFF"/>
+                      </a:solidFill>
+                      <a:prstDash val="solid"/>
+                      <a:round/>
+                      <a:headEnd len="sm" w="sm" type="none"/>
+                      <a:tailEnd len="sm" w="sm" type="none"/>
+                    </a:lnR>
+                    <a:lnT cap="flat" cmpd="sng" w="12700">
+                      <a:solidFill>
+                        <a:srgbClr val="FFFFFF"/>
+                      </a:solidFill>
+                      <a:prstDash val="solid"/>
+                      <a:round/>
+                      <a:headEnd len="sm" w="sm" type="none"/>
+                      <a:tailEnd len="sm" w="sm" type="none"/>
+                    </a:lnT>
+                    <a:lnB cap="flat" cmpd="sng" w="12700">
+                      <a:solidFill>
+                        <a:srgbClr val="FFFFFF"/>
+                      </a:solidFill>
+                      <a:prstDash val="solid"/>
+                      <a:round/>
+                      <a:headEnd len="sm" w="sm" type="none"/>
+                      <a:tailEnd len="sm" w="sm" type="none"/>
+                    </a:lnB>
+                  </a:tcPr>
                 </a:tc>
               </a:tr>
               <a:tr h="750575">
@@ -23376,7 +23751,761 @@
                           <a:spcPts val="0"/>
                         </a:spcAft>
                         <a:buClr>
-                          <a:schemeClr val="dk1"/>
+                          <a:srgbClr val="000000"/>
+                        </a:buClr>
+                        <a:buSzPts val="1000"/>
+                        <a:buFont typeface="Times New Roman"/>
+                        <a:buNone/>
+                      </a:pPr>
+                      <a:r>
+                        <a:rPr b="0" lang="en" sz="1000" u="none" cap="none" strike="noStrike">
+                          <a:latin typeface="Times New Roman"/>
+                          <a:ea typeface="Times New Roman"/>
+                          <a:cs typeface="Times New Roman"/>
+                          <a:sym typeface="Times New Roman"/>
+                        </a:rPr>
+                        <a:t>Li et al. (2025)</a:t>
+                      </a:r>
+                      <a:endParaRPr b="0" sz="1000" u="none" cap="none" strike="noStrike">
+                        <a:latin typeface="Times New Roman"/>
+                        <a:ea typeface="Times New Roman"/>
+                        <a:cs typeface="Times New Roman"/>
+                        <a:sym typeface="Times New Roman"/>
+                      </a:endParaRPr>
+                    </a:p>
+                  </a:txBody>
+                  <a:tcPr marT="45725" marB="45725" marR="91450" marL="91450">
+                    <a:lnL cap="flat" cmpd="sng" w="12700">
+                      <a:solidFill>
+                        <a:srgbClr val="FFFFFF"/>
+                      </a:solidFill>
+                      <a:prstDash val="solid"/>
+                      <a:round/>
+                      <a:headEnd len="sm" w="sm" type="none"/>
+                      <a:tailEnd len="sm" w="sm" type="none"/>
+                    </a:lnL>
+                    <a:lnR cap="flat" cmpd="sng" w="12700">
+                      <a:solidFill>
+                        <a:srgbClr val="FFFFFF"/>
+                      </a:solidFill>
+                      <a:prstDash val="solid"/>
+                      <a:round/>
+                      <a:headEnd len="sm" w="sm" type="none"/>
+                      <a:tailEnd len="sm" w="sm" type="none"/>
+                    </a:lnR>
+                    <a:lnT cap="flat" cmpd="sng" w="12700">
+                      <a:solidFill>
+                        <a:srgbClr val="FFFFFF"/>
+                      </a:solidFill>
+                      <a:prstDash val="solid"/>
+                      <a:round/>
+                      <a:headEnd len="sm" w="sm" type="none"/>
+                      <a:tailEnd len="sm" w="sm" type="none"/>
+                    </a:lnT>
+                    <a:lnB cap="flat" cmpd="sng" w="12700">
+                      <a:solidFill>
+                        <a:srgbClr val="FFFFFF"/>
+                      </a:solidFill>
+                      <a:prstDash val="solid"/>
+                      <a:round/>
+                      <a:headEnd len="sm" w="sm" type="none"/>
+                      <a:tailEnd len="sm" w="sm" type="none"/>
+                    </a:lnB>
+                  </a:tcPr>
+                </a:tc>
+                <a:tc>
+                  <a:txBody>
+                    <a:bodyPr/>
+                    <a:lstStyle/>
+                    <a:p>
+                      <a:pPr indent="0" lvl="0" marL="0" marR="0" rtl="0" algn="l">
+                        <a:spcBef>
+                          <a:spcPts val="0"/>
+                        </a:spcBef>
+                        <a:spcAft>
+                          <a:spcPts val="0"/>
+                        </a:spcAft>
+                        <a:buClr>
+                          <a:srgbClr val="000000"/>
+                        </a:buClr>
+                        <a:buSzPts val="1000"/>
+                        <a:buFont typeface="Times New Roman"/>
+                        <a:buNone/>
+                      </a:pPr>
+                      <a:r>
+                        <a:rPr b="0" lang="en" sz="1000" u="none" cap="none" strike="noStrike">
+                          <a:latin typeface="Times New Roman"/>
+                          <a:ea typeface="Times New Roman"/>
+                          <a:cs typeface="Times New Roman"/>
+                          <a:sym typeface="Times New Roman"/>
+                        </a:rPr>
+                        <a:t>Injecting vulnerability steering vectors into LLM activation layers without altering original parameters.</a:t>
+                      </a:r>
+                      <a:endParaRPr b="0" sz="1000" u="none" cap="none" strike="noStrike">
+                        <a:latin typeface="Times New Roman"/>
+                        <a:ea typeface="Times New Roman"/>
+                        <a:cs typeface="Times New Roman"/>
+                        <a:sym typeface="Times New Roman"/>
+                      </a:endParaRPr>
+                    </a:p>
+                  </a:txBody>
+                  <a:tcPr marT="45725" marB="45725" marR="91450" marL="91450">
+                    <a:lnL cap="flat" cmpd="sng" w="12700">
+                      <a:solidFill>
+                        <a:srgbClr val="FFFFFF"/>
+                      </a:solidFill>
+                      <a:prstDash val="solid"/>
+                      <a:round/>
+                      <a:headEnd len="sm" w="sm" type="none"/>
+                      <a:tailEnd len="sm" w="sm" type="none"/>
+                    </a:lnL>
+                    <a:lnR cap="flat" cmpd="sng" w="12700">
+                      <a:solidFill>
+                        <a:srgbClr val="FFFFFF"/>
+                      </a:solidFill>
+                      <a:prstDash val="solid"/>
+                      <a:round/>
+                      <a:headEnd len="sm" w="sm" type="none"/>
+                      <a:tailEnd len="sm" w="sm" type="none"/>
+                    </a:lnR>
+                    <a:lnT cap="flat" cmpd="sng" w="12700">
+                      <a:solidFill>
+                        <a:srgbClr val="FFFFFF"/>
+                      </a:solidFill>
+                      <a:prstDash val="solid"/>
+                      <a:round/>
+                      <a:headEnd len="sm" w="sm" type="none"/>
+                      <a:tailEnd len="sm" w="sm" type="none"/>
+                    </a:lnT>
+                    <a:lnB cap="flat" cmpd="sng" w="12700">
+                      <a:solidFill>
+                        <a:srgbClr val="FFFFFF"/>
+                      </a:solidFill>
+                      <a:prstDash val="solid"/>
+                      <a:round/>
+                      <a:headEnd len="sm" w="sm" type="none"/>
+                      <a:tailEnd len="sm" w="sm" type="none"/>
+                    </a:lnB>
+                  </a:tcPr>
+                </a:tc>
+                <a:tc>
+                  <a:txBody>
+                    <a:bodyPr/>
+                    <a:lstStyle/>
+                    <a:p>
+                      <a:pPr indent="0" lvl="0" marL="0" marR="0" rtl="0" algn="l">
+                        <a:spcBef>
+                          <a:spcPts val="0"/>
+                        </a:spcBef>
+                        <a:spcAft>
+                          <a:spcPts val="0"/>
+                        </a:spcAft>
+                        <a:buClr>
+                          <a:srgbClr val="000000"/>
+                        </a:buClr>
+                        <a:buSzPts val="1000"/>
+                        <a:buFont typeface="Times New Roman"/>
+                        <a:buNone/>
+                      </a:pPr>
+                      <a:r>
+                        <a:rPr b="0" lang="en" sz="1000" u="none" cap="none" strike="noStrike">
+                          <a:latin typeface="Times New Roman"/>
+                          <a:ea typeface="Times New Roman"/>
+                          <a:cs typeface="Times New Roman"/>
+                          <a:sym typeface="Times New Roman"/>
+                        </a:rPr>
+                        <a:t>SARD, FFmpeg+Qemu, Reveal, REEF.</a:t>
+                      </a:r>
+                      <a:endParaRPr b="0" sz="1000" u="none" cap="none" strike="noStrike">
+                        <a:latin typeface="Times New Roman"/>
+                        <a:ea typeface="Times New Roman"/>
+                        <a:cs typeface="Times New Roman"/>
+                        <a:sym typeface="Times New Roman"/>
+                      </a:endParaRPr>
+                    </a:p>
+                  </a:txBody>
+                  <a:tcPr marT="45725" marB="45725" marR="91450" marL="91450">
+                    <a:lnL cap="flat" cmpd="sng" w="12700">
+                      <a:solidFill>
+                        <a:srgbClr val="FFFFFF"/>
+                      </a:solidFill>
+                      <a:prstDash val="solid"/>
+                      <a:round/>
+                      <a:headEnd len="sm" w="sm" type="none"/>
+                      <a:tailEnd len="sm" w="sm" type="none"/>
+                    </a:lnL>
+                    <a:lnR cap="flat" cmpd="sng" w="12700">
+                      <a:solidFill>
+                        <a:srgbClr val="FFFFFF"/>
+                      </a:solidFill>
+                      <a:prstDash val="solid"/>
+                      <a:round/>
+                      <a:headEnd len="sm" w="sm" type="none"/>
+                      <a:tailEnd len="sm" w="sm" type="none"/>
+                    </a:lnR>
+                    <a:lnT cap="flat" cmpd="sng" w="12700">
+                      <a:solidFill>
+                        <a:srgbClr val="FFFFFF"/>
+                      </a:solidFill>
+                      <a:prstDash val="solid"/>
+                      <a:round/>
+                      <a:headEnd len="sm" w="sm" type="none"/>
+                      <a:tailEnd len="sm" w="sm" type="none"/>
+                    </a:lnT>
+                    <a:lnB cap="flat" cmpd="sng" w="12700">
+                      <a:solidFill>
+                        <a:srgbClr val="FFFFFF"/>
+                      </a:solidFill>
+                      <a:prstDash val="solid"/>
+                      <a:round/>
+                      <a:headEnd len="sm" w="sm" type="none"/>
+                      <a:tailEnd len="sm" w="sm" type="none"/>
+                    </a:lnB>
+                  </a:tcPr>
+                </a:tc>
+                <a:tc>
+                  <a:txBody>
+                    <a:bodyPr/>
+                    <a:lstStyle/>
+                    <a:p>
+                      <a:pPr indent="0" lvl="0" marL="0" marR="0" rtl="0" algn="l">
+                        <a:spcBef>
+                          <a:spcPts val="0"/>
+                        </a:spcBef>
+                        <a:spcAft>
+                          <a:spcPts val="0"/>
+                        </a:spcAft>
+                        <a:buClr>
+                          <a:srgbClr val="000000"/>
+                        </a:buClr>
+                        <a:buSzPts val="1000"/>
+                        <a:buFont typeface="Times New Roman"/>
+                        <a:buNone/>
+                      </a:pPr>
+                      <a:r>
+                        <a:rPr b="0" lang="en" sz="1000" u="none" cap="none" strike="noStrike">
+                          <a:latin typeface="Times New Roman"/>
+                          <a:ea typeface="Times New Roman"/>
+                          <a:cs typeface="Times New Roman"/>
+                          <a:sym typeface="Times New Roman"/>
+                        </a:rPr>
+                        <a:t>Outperformed state-of-the-art methods with a 12.86% F1-score increase on real-world datasets.</a:t>
+                      </a:r>
+                      <a:endParaRPr b="0" sz="1000" u="none" cap="none" strike="noStrike">
+                        <a:latin typeface="Times New Roman"/>
+                        <a:ea typeface="Times New Roman"/>
+                        <a:cs typeface="Times New Roman"/>
+                        <a:sym typeface="Times New Roman"/>
+                      </a:endParaRPr>
+                    </a:p>
+                  </a:txBody>
+                  <a:tcPr marT="45725" marB="45725" marR="91450" marL="91450">
+                    <a:lnL cap="flat" cmpd="sng" w="12700">
+                      <a:solidFill>
+                        <a:srgbClr val="FFFFFF"/>
+                      </a:solidFill>
+                      <a:prstDash val="solid"/>
+                      <a:round/>
+                      <a:headEnd len="sm" w="sm" type="none"/>
+                      <a:tailEnd len="sm" w="sm" type="none"/>
+                    </a:lnL>
+                    <a:lnR cap="flat" cmpd="sng" w="12700">
+                      <a:solidFill>
+                        <a:srgbClr val="FFFFFF"/>
+                      </a:solidFill>
+                      <a:prstDash val="solid"/>
+                      <a:round/>
+                      <a:headEnd len="sm" w="sm" type="none"/>
+                      <a:tailEnd len="sm" w="sm" type="none"/>
+                    </a:lnR>
+                    <a:lnT cap="flat" cmpd="sng" w="12700">
+                      <a:solidFill>
+                        <a:srgbClr val="FFFFFF"/>
+                      </a:solidFill>
+                      <a:prstDash val="solid"/>
+                      <a:round/>
+                      <a:headEnd len="sm" w="sm" type="none"/>
+                      <a:tailEnd len="sm" w="sm" type="none"/>
+                    </a:lnT>
+                    <a:lnB cap="flat" cmpd="sng" w="12700">
+                      <a:solidFill>
+                        <a:srgbClr val="FFFFFF"/>
+                      </a:solidFill>
+                      <a:prstDash val="solid"/>
+                      <a:round/>
+                      <a:headEnd len="sm" w="sm" type="none"/>
+                      <a:tailEnd len="sm" w="sm" type="none"/>
+                    </a:lnB>
+                  </a:tcPr>
+                </a:tc>
+                <a:tc>
+                  <a:txBody>
+                    <a:bodyPr/>
+                    <a:lstStyle/>
+                    <a:p>
+                      <a:pPr indent="0" lvl="0" marL="0" marR="0" rtl="0" algn="l">
+                        <a:spcBef>
+                          <a:spcPts val="0"/>
+                        </a:spcBef>
+                        <a:spcAft>
+                          <a:spcPts val="0"/>
+                        </a:spcAft>
+                        <a:buClr>
+                          <a:srgbClr val="000000"/>
+                        </a:buClr>
+                        <a:buSzPts val="1000"/>
+                        <a:buFont typeface="Times New Roman"/>
+                        <a:buNone/>
+                      </a:pPr>
+                      <a:r>
+                        <a:rPr b="0" lang="en" sz="1000" u="none" cap="none" strike="noStrike">
+                          <a:latin typeface="Times New Roman"/>
+                          <a:ea typeface="Times New Roman"/>
+                          <a:cs typeface="Times New Roman"/>
+                          <a:sym typeface="Times New Roman"/>
+                        </a:rPr>
+                        <a:t>Existing representation methods focus on overall semantics instead of isolating specific vulnerability concepts.</a:t>
+                      </a:r>
+                      <a:endParaRPr b="0" sz="1000" u="none" cap="none" strike="noStrike">
+                        <a:latin typeface="Times New Roman"/>
+                        <a:ea typeface="Times New Roman"/>
+                        <a:cs typeface="Times New Roman"/>
+                        <a:sym typeface="Times New Roman"/>
+                      </a:endParaRPr>
+                    </a:p>
+                  </a:txBody>
+                  <a:tcPr marT="45725" marB="45725" marR="91450" marL="91450">
+                    <a:lnL cap="flat" cmpd="sng" w="12700">
+                      <a:solidFill>
+                        <a:srgbClr val="FFFFFF"/>
+                      </a:solidFill>
+                      <a:prstDash val="solid"/>
+                      <a:round/>
+                      <a:headEnd len="sm" w="sm" type="none"/>
+                      <a:tailEnd len="sm" w="sm" type="none"/>
+                    </a:lnL>
+                    <a:lnR cap="flat" cmpd="sng" w="12700">
+                      <a:solidFill>
+                        <a:srgbClr val="FFFFFF"/>
+                      </a:solidFill>
+                      <a:prstDash val="solid"/>
+                      <a:round/>
+                      <a:headEnd len="sm" w="sm" type="none"/>
+                      <a:tailEnd len="sm" w="sm" type="none"/>
+                    </a:lnR>
+                    <a:lnT cap="flat" cmpd="sng" w="12700">
+                      <a:solidFill>
+                        <a:srgbClr val="FFFFFF"/>
+                      </a:solidFill>
+                      <a:prstDash val="solid"/>
+                      <a:round/>
+                      <a:headEnd len="sm" w="sm" type="none"/>
+                      <a:tailEnd len="sm" w="sm" type="none"/>
+                    </a:lnT>
+                    <a:lnB cap="flat" cmpd="sng" w="12700">
+                      <a:solidFill>
+                        <a:srgbClr val="FFFFFF"/>
+                      </a:solidFill>
+                      <a:prstDash val="solid"/>
+                      <a:round/>
+                      <a:headEnd len="sm" w="sm" type="none"/>
+                      <a:tailEnd len="sm" w="sm" type="none"/>
+                    </a:lnB>
+                  </a:tcPr>
+                </a:tc>
+              </a:tr>
+              <a:tr h="751200">
+                <a:tc>
+                  <a:txBody>
+                    <a:bodyPr/>
+                    <a:lstStyle/>
+                    <a:p>
+                      <a:pPr indent="0" lvl="0" marL="0" marR="0" rtl="0" algn="l">
+                        <a:spcBef>
+                          <a:spcPts val="0"/>
+                        </a:spcBef>
+                        <a:spcAft>
+                          <a:spcPts val="0"/>
+                        </a:spcAft>
+                        <a:buClr>
+                          <a:srgbClr val="000000"/>
+                        </a:buClr>
+                        <a:buSzPts val="1000"/>
+                        <a:buFont typeface="Times New Roman"/>
+                        <a:buNone/>
+                      </a:pPr>
+                      <a:r>
+                        <a:rPr b="0" lang="en" sz="1000" u="none" cap="none" strike="noStrike">
+                          <a:latin typeface="Times New Roman"/>
+                          <a:ea typeface="Times New Roman"/>
+                          <a:cs typeface="Times New Roman"/>
+                          <a:sym typeface="Times New Roman"/>
+                        </a:rPr>
+                        <a:t>Kim et al. (2025)</a:t>
+                      </a:r>
+                      <a:endParaRPr b="0" sz="1000" u="none" cap="none" strike="noStrike">
+                        <a:latin typeface="Times New Roman"/>
+                        <a:ea typeface="Times New Roman"/>
+                        <a:cs typeface="Times New Roman"/>
+                        <a:sym typeface="Times New Roman"/>
+                      </a:endParaRPr>
+                    </a:p>
+                  </a:txBody>
+                  <a:tcPr marT="45725" marB="45725" marR="91450" marL="91450">
+                    <a:lnL cap="flat" cmpd="sng" w="12700">
+                      <a:solidFill>
+                        <a:srgbClr val="FFFFFF"/>
+                      </a:solidFill>
+                      <a:prstDash val="solid"/>
+                      <a:round/>
+                      <a:headEnd len="sm" w="sm" type="none"/>
+                      <a:tailEnd len="sm" w="sm" type="none"/>
+                    </a:lnL>
+                    <a:lnR cap="flat" cmpd="sng" w="12700">
+                      <a:solidFill>
+                        <a:srgbClr val="FFFFFF"/>
+                      </a:solidFill>
+                      <a:prstDash val="solid"/>
+                      <a:round/>
+                      <a:headEnd len="sm" w="sm" type="none"/>
+                      <a:tailEnd len="sm" w="sm" type="none"/>
+                    </a:lnR>
+                    <a:lnT cap="flat" cmpd="sng" w="12700">
+                      <a:solidFill>
+                        <a:srgbClr val="FFFFFF"/>
+                      </a:solidFill>
+                      <a:prstDash val="solid"/>
+                      <a:round/>
+                      <a:headEnd len="sm" w="sm" type="none"/>
+                      <a:tailEnd len="sm" w="sm" type="none"/>
+                    </a:lnT>
+                    <a:lnB cap="flat" cmpd="sng" w="12700">
+                      <a:solidFill>
+                        <a:srgbClr val="FFFFFF"/>
+                      </a:solidFill>
+                      <a:prstDash val="solid"/>
+                      <a:round/>
+                      <a:headEnd len="sm" w="sm" type="none"/>
+                      <a:tailEnd len="sm" w="sm" type="none"/>
+                    </a:lnB>
+                  </a:tcPr>
+                </a:tc>
+                <a:tc>
+                  <a:txBody>
+                    <a:bodyPr/>
+                    <a:lstStyle/>
+                    <a:p>
+                      <a:pPr indent="0" lvl="0" marL="0" marR="0" rtl="0" algn="l">
+                        <a:spcBef>
+                          <a:spcPts val="0"/>
+                        </a:spcBef>
+                        <a:spcAft>
+                          <a:spcPts val="0"/>
+                        </a:spcAft>
+                        <a:buClr>
+                          <a:srgbClr val="000000"/>
+                        </a:buClr>
+                        <a:buSzPts val="1000"/>
+                        <a:buFont typeface="Times New Roman"/>
+                        <a:buNone/>
+                      </a:pPr>
+                      <a:r>
+                        <a:rPr b="0" lang="en" sz="1000" u="none" cap="none" strike="noStrike">
+                          <a:latin typeface="Times New Roman"/>
+                          <a:ea typeface="Times New Roman"/>
+                          <a:cs typeface="Times New Roman"/>
+                          <a:sym typeface="Times New Roman"/>
+                        </a:rPr>
+                        <a:t>Reinforcement learning (RL) based context generator to infer contextual signals from user prompts.</a:t>
+                      </a:r>
+                      <a:endParaRPr b="0" sz="1000" u="none" cap="none" strike="noStrike">
+                        <a:latin typeface="Times New Roman"/>
+                        <a:ea typeface="Times New Roman"/>
+                        <a:cs typeface="Times New Roman"/>
+                        <a:sym typeface="Times New Roman"/>
+                      </a:endParaRPr>
+                    </a:p>
+                  </a:txBody>
+                  <a:tcPr marT="45725" marB="45725" marR="91450" marL="91450">
+                    <a:lnL cap="flat" cmpd="sng" w="12700">
+                      <a:solidFill>
+                        <a:srgbClr val="FFFFFF"/>
+                      </a:solidFill>
+                      <a:prstDash val="solid"/>
+                      <a:round/>
+                      <a:headEnd len="sm" w="sm" type="none"/>
+                      <a:tailEnd len="sm" w="sm" type="none"/>
+                    </a:lnL>
+                    <a:lnR cap="flat" cmpd="sng" w="12700">
+                      <a:solidFill>
+                        <a:srgbClr val="FFFFFF"/>
+                      </a:solidFill>
+                      <a:prstDash val="solid"/>
+                      <a:round/>
+                      <a:headEnd len="sm" w="sm" type="none"/>
+                      <a:tailEnd len="sm" w="sm" type="none"/>
+                    </a:lnR>
+                    <a:lnT cap="flat" cmpd="sng" w="12700">
+                      <a:solidFill>
+                        <a:srgbClr val="FFFFFF"/>
+                      </a:solidFill>
+                      <a:prstDash val="solid"/>
+                      <a:round/>
+                      <a:headEnd len="sm" w="sm" type="none"/>
+                      <a:tailEnd len="sm" w="sm" type="none"/>
+                    </a:lnT>
+                    <a:lnB cap="flat" cmpd="sng" w="12700">
+                      <a:solidFill>
+                        <a:srgbClr val="FFFFFF"/>
+                      </a:solidFill>
+                      <a:prstDash val="solid"/>
+                      <a:round/>
+                      <a:headEnd len="sm" w="sm" type="none"/>
+                      <a:tailEnd len="sm" w="sm" type="none"/>
+                    </a:lnB>
+                  </a:tcPr>
+                </a:tc>
+                <a:tc>
+                  <a:txBody>
+                    <a:bodyPr/>
+                    <a:lstStyle/>
+                    <a:p>
+                      <a:pPr indent="0" lvl="0" marL="0" marR="0" rtl="0" algn="l">
+                        <a:spcBef>
+                          <a:spcPts val="0"/>
+                        </a:spcBef>
+                        <a:spcAft>
+                          <a:spcPts val="0"/>
+                        </a:spcAft>
+                        <a:buClr>
+                          <a:srgbClr val="000000"/>
+                        </a:buClr>
+                        <a:buSzPts val="1000"/>
+                        <a:buFont typeface="Times New Roman"/>
+                        <a:buNone/>
+                      </a:pPr>
+                      <a:r>
+                        <a:rPr b="0" lang="en" sz="1000" u="none" cap="none" strike="noStrike">
+                          <a:latin typeface="Times New Roman"/>
+                          <a:ea typeface="Times New Roman"/>
+                          <a:cs typeface="Times New Roman"/>
+                          <a:sym typeface="Times New Roman"/>
+                        </a:rPr>
+                        <a:t>SafetyInstruct, Advbench, Wildjailbreak, XSTest.</a:t>
+                      </a:r>
+                      <a:endParaRPr b="0" sz="1000" u="none" cap="none" strike="noStrike">
+                        <a:latin typeface="Times New Roman"/>
+                        <a:ea typeface="Times New Roman"/>
+                        <a:cs typeface="Times New Roman"/>
+                        <a:sym typeface="Times New Roman"/>
+                      </a:endParaRPr>
+                    </a:p>
+                  </a:txBody>
+                  <a:tcPr marT="45725" marB="45725" marR="91450" marL="91450">
+                    <a:lnL cap="flat" cmpd="sng" w="12700">
+                      <a:solidFill>
+                        <a:srgbClr val="FFFFFF"/>
+                      </a:solidFill>
+                      <a:prstDash val="solid"/>
+                      <a:round/>
+                      <a:headEnd len="sm" w="sm" type="none"/>
+                      <a:tailEnd len="sm" w="sm" type="none"/>
+                    </a:lnL>
+                    <a:lnR cap="flat" cmpd="sng" w="12700">
+                      <a:solidFill>
+                        <a:srgbClr val="FFFFFF"/>
+                      </a:solidFill>
+                      <a:prstDash val="solid"/>
+                      <a:round/>
+                      <a:headEnd len="sm" w="sm" type="none"/>
+                      <a:tailEnd len="sm" w="sm" type="none"/>
+                    </a:lnR>
+                    <a:lnT cap="flat" cmpd="sng" w="12700">
+                      <a:solidFill>
+                        <a:srgbClr val="FFFFFF"/>
+                      </a:solidFill>
+                      <a:prstDash val="solid"/>
+                      <a:round/>
+                      <a:headEnd len="sm" w="sm" type="none"/>
+                      <a:tailEnd len="sm" w="sm" type="none"/>
+                    </a:lnT>
+                    <a:lnB cap="flat" cmpd="sng" w="12700">
+                      <a:solidFill>
+                        <a:srgbClr val="FFFFFF"/>
+                      </a:solidFill>
+                      <a:prstDash val="solid"/>
+                      <a:round/>
+                      <a:headEnd len="sm" w="sm" type="none"/>
+                      <a:tailEnd len="sm" w="sm" type="none"/>
+                    </a:lnB>
+                  </a:tcPr>
+                </a:tc>
+                <a:tc>
+                  <a:txBody>
+                    <a:bodyPr/>
+                    <a:lstStyle/>
+                    <a:p>
+                      <a:pPr indent="0" lvl="0" marL="0" marR="0" rtl="0" algn="l">
+                        <a:spcBef>
+                          <a:spcPts val="0"/>
+                        </a:spcBef>
+                        <a:spcAft>
+                          <a:spcPts val="0"/>
+                        </a:spcAft>
+                        <a:buClr>
+                          <a:srgbClr val="000000"/>
+                        </a:buClr>
+                        <a:buSzPts val="1000"/>
+                        <a:buFont typeface="Times New Roman"/>
+                        <a:buNone/>
+                      </a:pPr>
+                      <a:r>
+                        <a:rPr b="0" lang="en" sz="1000" u="none" cap="none" strike="noStrike">
+                          <a:latin typeface="Times New Roman"/>
+                          <a:ea typeface="Times New Roman"/>
+                          <a:cs typeface="Times New Roman"/>
+                          <a:sym typeface="Times New Roman"/>
+                        </a:rPr>
+                        <a:t>Reduces harmful responses while preventing unnecessary refusals of benign requests.</a:t>
+                      </a:r>
+                      <a:endParaRPr b="0" sz="1000" u="none" cap="none" strike="noStrike">
+                        <a:latin typeface="Times New Roman"/>
+                        <a:ea typeface="Times New Roman"/>
+                        <a:cs typeface="Times New Roman"/>
+                        <a:sym typeface="Times New Roman"/>
+                      </a:endParaRPr>
+                    </a:p>
+                  </a:txBody>
+                  <a:tcPr marT="45725" marB="45725" marR="91450" marL="91450">
+                    <a:lnL cap="flat" cmpd="sng" w="12700">
+                      <a:solidFill>
+                        <a:srgbClr val="FFFFFF"/>
+                      </a:solidFill>
+                      <a:prstDash val="solid"/>
+                      <a:round/>
+                      <a:headEnd len="sm" w="sm" type="none"/>
+                      <a:tailEnd len="sm" w="sm" type="none"/>
+                    </a:lnL>
+                    <a:lnR cap="flat" cmpd="sng" w="12700">
+                      <a:solidFill>
+                        <a:srgbClr val="FFFFFF"/>
+                      </a:solidFill>
+                      <a:prstDash val="solid"/>
+                      <a:round/>
+                      <a:headEnd len="sm" w="sm" type="none"/>
+                      <a:tailEnd len="sm" w="sm" type="none"/>
+                    </a:lnR>
+                    <a:lnT cap="flat" cmpd="sng" w="12700">
+                      <a:solidFill>
+                        <a:srgbClr val="FFFFFF"/>
+                      </a:solidFill>
+                      <a:prstDash val="solid"/>
+                      <a:round/>
+                      <a:headEnd len="sm" w="sm" type="none"/>
+                      <a:tailEnd len="sm" w="sm" type="none"/>
+                    </a:lnT>
+                    <a:lnB cap="flat" cmpd="sng" w="12700">
+                      <a:solidFill>
+                        <a:srgbClr val="FFFFFF"/>
+                      </a:solidFill>
+                      <a:prstDash val="solid"/>
+                      <a:round/>
+                      <a:headEnd len="sm" w="sm" type="none"/>
+                      <a:tailEnd len="sm" w="sm" type="none"/>
+                    </a:lnB>
+                  </a:tcPr>
+                </a:tc>
+                <a:tc>
+                  <a:txBody>
+                    <a:bodyPr/>
+                    <a:lstStyle/>
+                    <a:p>
+                      <a:pPr indent="0" lvl="0" marL="0" marR="0" rtl="0" algn="l">
+                        <a:spcBef>
+                          <a:spcPts val="0"/>
+                        </a:spcBef>
+                        <a:spcAft>
+                          <a:spcPts val="0"/>
+                        </a:spcAft>
+                        <a:buClr>
+                          <a:srgbClr val="000000"/>
+                        </a:buClr>
+                        <a:buSzPts val="1000"/>
+                        <a:buFont typeface="Times New Roman"/>
+                        <a:buNone/>
+                      </a:pPr>
+                      <a:r>
+                        <a:rPr b="0" lang="en" sz="1000" u="none" cap="none" strike="noStrike">
+                          <a:latin typeface="Times New Roman"/>
+                          <a:ea typeface="Times New Roman"/>
+                          <a:cs typeface="Times New Roman"/>
+                          <a:sym typeface="Times New Roman"/>
+                        </a:rPr>
+                        <a:t>Conventional LLM frameworks fail on ambiguous tasks; extracting context is necessary to prevent bypassing safeguards.</a:t>
+                      </a:r>
+                      <a:endParaRPr b="0" sz="1000" u="none" cap="none" strike="noStrike">
+                        <a:latin typeface="Times New Roman"/>
+                        <a:ea typeface="Times New Roman"/>
+                        <a:cs typeface="Times New Roman"/>
+                        <a:sym typeface="Times New Roman"/>
+                      </a:endParaRPr>
+                    </a:p>
+                  </a:txBody>
+                  <a:tcPr marT="45725" marB="45725" marR="91450" marL="91450">
+                    <a:lnL cap="flat" cmpd="sng" w="12700">
+                      <a:solidFill>
+                        <a:srgbClr val="FFFFFF"/>
+                      </a:solidFill>
+                      <a:prstDash val="solid"/>
+                      <a:round/>
+                      <a:headEnd len="sm" w="sm" type="none"/>
+                      <a:tailEnd len="sm" w="sm" type="none"/>
+                    </a:lnL>
+                    <a:lnR cap="flat" cmpd="sng" w="12700">
+                      <a:solidFill>
+                        <a:srgbClr val="FFFFFF"/>
+                      </a:solidFill>
+                      <a:prstDash val="solid"/>
+                      <a:round/>
+                      <a:headEnd len="sm" w="sm" type="none"/>
+                      <a:tailEnd len="sm" w="sm" type="none"/>
+                    </a:lnR>
+                    <a:lnT cap="flat" cmpd="sng" w="12700">
+                      <a:solidFill>
+                        <a:srgbClr val="FFFFFF"/>
+                      </a:solidFill>
+                      <a:prstDash val="solid"/>
+                      <a:round/>
+                      <a:headEnd len="sm" w="sm" type="none"/>
+                      <a:tailEnd len="sm" w="sm" type="none"/>
+                    </a:lnT>
+                    <a:lnB cap="flat" cmpd="sng" w="12700">
+                      <a:solidFill>
+                        <a:srgbClr val="FFFFFF"/>
+                      </a:solidFill>
+                      <a:prstDash val="solid"/>
+                      <a:round/>
+                      <a:headEnd len="sm" w="sm" type="none"/>
+                      <a:tailEnd len="sm" w="sm" type="none"/>
+                    </a:lnB>
+                  </a:tcPr>
+                </a:tc>
+              </a:tr>
+              <a:tr h="750575">
+                <a:tc>
+                  <a:txBody>
+                    <a:bodyPr/>
+                    <a:lstStyle/>
+                    <a:p>
+                      <a:pPr indent="0" lvl="0" marL="0" marR="0" rtl="0" algn="l">
+                        <a:spcBef>
+                          <a:spcPts val="0"/>
+                        </a:spcBef>
+                        <a:spcAft>
+                          <a:spcPts val="0"/>
+                        </a:spcAft>
+                        <a:buClr>
+                          <a:srgbClr val="000000"/>
                         </a:buClr>
                         <a:buSzPts val="1000"/>
                         <a:buFont typeface="Times New Roman"/>
@@ -23399,7 +24528,44 @@
                       </a:endParaRPr>
                     </a:p>
                   </a:txBody>
-                  <a:tcPr marT="45725" marB="45725" marR="91450" marL="91450"/>
+                  <a:tcPr marT="45725" marB="45725" marR="91450" marL="91450">
+                    <a:lnL cap="flat" cmpd="sng" w="12700">
+                      <a:solidFill>
+                        <a:srgbClr val="FFFFFF"/>
+                      </a:solidFill>
+                      <a:prstDash val="solid"/>
+                      <a:round/>
+                      <a:headEnd len="sm" w="sm" type="none"/>
+                      <a:tailEnd len="sm" w="sm" type="none"/>
+                    </a:lnL>
+                    <a:lnR cap="flat" cmpd="sng" w="12700">
+                      <a:solidFill>
+                        <a:srgbClr val="FFFFFF"/>
+                      </a:solidFill>
+                      <a:prstDash val="solid"/>
+                      <a:round/>
+                      <a:headEnd len="sm" w="sm" type="none"/>
+                      <a:tailEnd len="sm" w="sm" type="none"/>
+                    </a:lnR>
+                    <a:lnT cap="flat" cmpd="sng" w="12700">
+                      <a:solidFill>
+                        <a:srgbClr val="FFFFFF"/>
+                      </a:solidFill>
+                      <a:prstDash val="solid"/>
+                      <a:round/>
+                      <a:headEnd len="sm" w="sm" type="none"/>
+                      <a:tailEnd len="sm" w="sm" type="none"/>
+                    </a:lnT>
+                    <a:lnB cap="flat" cmpd="sng" w="38100">
+                      <a:solidFill>
+                        <a:srgbClr val="FFFFFF"/>
+                      </a:solidFill>
+                      <a:prstDash val="solid"/>
+                      <a:round/>
+                      <a:headEnd len="sm" w="sm" type="none"/>
+                      <a:tailEnd len="sm" w="sm" type="none"/>
+                    </a:lnB>
+                  </a:tcPr>
                 </a:tc>
                 <a:tc>
                   <a:txBody>
@@ -23414,7 +24580,7 @@
                           <a:spcPts val="0"/>
                         </a:spcAft>
                         <a:buClr>
-                          <a:schemeClr val="dk1"/>
+                          <a:srgbClr val="000000"/>
                         </a:buClr>
                         <a:buSzPts val="1000"/>
                         <a:buFont typeface="Times New Roman"/>
@@ -23437,7 +24603,44 @@
                       </a:endParaRPr>
                     </a:p>
                   </a:txBody>
-                  <a:tcPr marT="45725" marB="45725" marR="91450" marL="91450"/>
+                  <a:tcPr marT="45725" marB="45725" marR="91450" marL="91450">
+                    <a:lnL cap="flat" cmpd="sng" w="12700">
+                      <a:solidFill>
+                        <a:srgbClr val="FFFFFF"/>
+                      </a:solidFill>
+                      <a:prstDash val="solid"/>
+                      <a:round/>
+                      <a:headEnd len="sm" w="sm" type="none"/>
+                      <a:tailEnd len="sm" w="sm" type="none"/>
+                    </a:lnL>
+                    <a:lnR cap="flat" cmpd="sng" w="12700">
+                      <a:solidFill>
+                        <a:srgbClr val="FFFFFF"/>
+                      </a:solidFill>
+                      <a:prstDash val="solid"/>
+                      <a:round/>
+                      <a:headEnd len="sm" w="sm" type="none"/>
+                      <a:tailEnd len="sm" w="sm" type="none"/>
+                    </a:lnR>
+                    <a:lnT cap="flat" cmpd="sng" w="12700">
+                      <a:solidFill>
+                        <a:srgbClr val="FFFFFF"/>
+                      </a:solidFill>
+                      <a:prstDash val="solid"/>
+                      <a:round/>
+                      <a:headEnd len="sm" w="sm" type="none"/>
+                      <a:tailEnd len="sm" w="sm" type="none"/>
+                    </a:lnT>
+                    <a:lnB cap="flat" cmpd="sng" w="38100">
+                      <a:solidFill>
+                        <a:srgbClr val="FFFFFF"/>
+                      </a:solidFill>
+                      <a:prstDash val="solid"/>
+                      <a:round/>
+                      <a:headEnd len="sm" w="sm" type="none"/>
+                      <a:tailEnd len="sm" w="sm" type="none"/>
+                    </a:lnB>
+                  </a:tcPr>
                 </a:tc>
                 <a:tc>
                   <a:txBody>
@@ -23452,7 +24655,7 @@
                           <a:spcPts val="0"/>
                         </a:spcAft>
                         <a:buClr>
-                          <a:schemeClr val="dk1"/>
+                          <a:srgbClr val="000000"/>
                         </a:buClr>
                         <a:buSzPts val="1000"/>
                         <a:buFont typeface="Times New Roman"/>
@@ -23475,7 +24678,44 @@
                       </a:endParaRPr>
                     </a:p>
                   </a:txBody>
-                  <a:tcPr marT="45725" marB="45725" marR="91450" marL="91450"/>
+                  <a:tcPr marT="45725" marB="45725" marR="91450" marL="91450">
+                    <a:lnL cap="flat" cmpd="sng" w="12700">
+                      <a:solidFill>
+                        <a:srgbClr val="FFFFFF"/>
+                      </a:solidFill>
+                      <a:prstDash val="solid"/>
+                      <a:round/>
+                      <a:headEnd len="sm" w="sm" type="none"/>
+                      <a:tailEnd len="sm" w="sm" type="none"/>
+                    </a:lnL>
+                    <a:lnR cap="flat" cmpd="sng" w="12700">
+                      <a:solidFill>
+                        <a:srgbClr val="FFFFFF"/>
+                      </a:solidFill>
+                      <a:prstDash val="solid"/>
+                      <a:round/>
+                      <a:headEnd len="sm" w="sm" type="none"/>
+                      <a:tailEnd len="sm" w="sm" type="none"/>
+                    </a:lnR>
+                    <a:lnT cap="flat" cmpd="sng" w="12700">
+                      <a:solidFill>
+                        <a:srgbClr val="FFFFFF"/>
+                      </a:solidFill>
+                      <a:prstDash val="solid"/>
+                      <a:round/>
+                      <a:headEnd len="sm" w="sm" type="none"/>
+                      <a:tailEnd len="sm" w="sm" type="none"/>
+                    </a:lnT>
+                    <a:lnB cap="flat" cmpd="sng" w="38100">
+                      <a:solidFill>
+                        <a:srgbClr val="FFFFFF"/>
+                      </a:solidFill>
+                      <a:prstDash val="solid"/>
+                      <a:round/>
+                      <a:headEnd len="sm" w="sm" type="none"/>
+                      <a:tailEnd len="sm" w="sm" type="none"/>
+                    </a:lnB>
+                  </a:tcPr>
                 </a:tc>
                 <a:tc>
                   <a:txBody>
@@ -23490,7 +24730,7 @@
                           <a:spcPts val="0"/>
                         </a:spcAft>
                         <a:buClr>
-                          <a:schemeClr val="dk1"/>
+                          <a:srgbClr val="000000"/>
                         </a:buClr>
                         <a:buSzPts val="1000"/>
                         <a:buFont typeface="Times New Roman"/>
@@ -23513,7 +24753,44 @@
                       </a:endParaRPr>
                     </a:p>
                   </a:txBody>
-                  <a:tcPr marT="45725" marB="45725" marR="91450" marL="91450"/>
+                  <a:tcPr marT="45725" marB="45725" marR="91450" marL="91450">
+                    <a:lnL cap="flat" cmpd="sng" w="12700">
+                      <a:solidFill>
+                        <a:srgbClr val="FFFFFF"/>
+                      </a:solidFill>
+                      <a:prstDash val="solid"/>
+                      <a:round/>
+                      <a:headEnd len="sm" w="sm" type="none"/>
+                      <a:tailEnd len="sm" w="sm" type="none"/>
+                    </a:lnL>
+                    <a:lnR cap="flat" cmpd="sng" w="12700">
+                      <a:solidFill>
+                        <a:srgbClr val="FFFFFF"/>
+                      </a:solidFill>
+                      <a:prstDash val="solid"/>
+                      <a:round/>
+                      <a:headEnd len="sm" w="sm" type="none"/>
+                      <a:tailEnd len="sm" w="sm" type="none"/>
+                    </a:lnR>
+                    <a:lnT cap="flat" cmpd="sng" w="12700">
+                      <a:solidFill>
+                        <a:srgbClr val="FFFFFF"/>
+                      </a:solidFill>
+                      <a:prstDash val="solid"/>
+                      <a:round/>
+                      <a:headEnd len="sm" w="sm" type="none"/>
+                      <a:tailEnd len="sm" w="sm" type="none"/>
+                    </a:lnT>
+                    <a:lnB cap="flat" cmpd="sng" w="38100">
+                      <a:solidFill>
+                        <a:srgbClr val="FFFFFF"/>
+                      </a:solidFill>
+                      <a:prstDash val="solid"/>
+                      <a:round/>
+                      <a:headEnd len="sm" w="sm" type="none"/>
+                      <a:tailEnd len="sm" w="sm" type="none"/>
+                    </a:lnB>
+                  </a:tcPr>
                 </a:tc>
                 <a:tc>
                   <a:txBody>
@@ -23528,7 +24805,7 @@
                           <a:spcPts val="0"/>
                         </a:spcAft>
                         <a:buClr>
-                          <a:schemeClr val="dk1"/>
+                          <a:srgbClr val="000000"/>
                         </a:buClr>
                         <a:buSzPts val="1000"/>
                         <a:buFont typeface="Times New Roman"/>
@@ -23551,391 +24828,44 @@
                       </a:endParaRPr>
                     </a:p>
                   </a:txBody>
-                  <a:tcPr marT="45725" marB="45725" marR="91450" marL="91450"/>
-                </a:tc>
-              </a:tr>
-              <a:tr h="751200">
-                <a:tc>
-                  <a:txBody>
-                    <a:bodyPr/>
-                    <a:lstStyle/>
-                    <a:p>
-                      <a:pPr indent="0" lvl="0" marL="0" marR="0" rtl="0" algn="l">
-                        <a:spcBef>
-                          <a:spcPts val="0"/>
-                        </a:spcBef>
-                        <a:spcAft>
-                          <a:spcPts val="0"/>
-                        </a:spcAft>
-                        <a:buClr>
-                          <a:schemeClr val="dk1"/>
-                        </a:buClr>
-                        <a:buSzPts val="1000"/>
-                        <a:buFont typeface="Times New Roman"/>
-                        <a:buNone/>
-                      </a:pPr>
-                      <a:r>
-                        <a:rPr b="0" lang="en" sz="1000" u="none" cap="none" strike="noStrike">
-                          <a:latin typeface="Times New Roman"/>
-                          <a:ea typeface="Times New Roman"/>
-                          <a:cs typeface="Times New Roman"/>
-                          <a:sym typeface="Times New Roman"/>
-                        </a:rPr>
-                        <a:t>Dozono et al. (2025)</a:t>
-                      </a:r>
-                      <a:endParaRPr b="0" sz="1000" u="none" cap="none" strike="noStrike">
-                        <a:latin typeface="Times New Roman"/>
-                        <a:ea typeface="Times New Roman"/>
-                        <a:cs typeface="Times New Roman"/>
-                        <a:sym typeface="Times New Roman"/>
-                      </a:endParaRPr>
-                    </a:p>
-                  </a:txBody>
-                  <a:tcPr marT="45725" marB="45725" marR="91450" marL="91450"/>
-                </a:tc>
-                <a:tc>
-                  <a:txBody>
-                    <a:bodyPr/>
-                    <a:lstStyle/>
-                    <a:p>
-                      <a:pPr indent="0" lvl="0" marL="0" marR="0" rtl="0" algn="l">
-                        <a:spcBef>
-                          <a:spcPts val="0"/>
-                        </a:spcBef>
-                        <a:spcAft>
-                          <a:spcPts val="0"/>
-                        </a:spcAft>
-                        <a:buClr>
-                          <a:schemeClr val="dk1"/>
-                        </a:buClr>
-                        <a:buSzPts val="1000"/>
-                        <a:buFont typeface="Times New Roman"/>
-                        <a:buNone/>
-                      </a:pPr>
-                      <a:r>
-                        <a:rPr b="0" lang="en" sz="1000" u="none" cap="none" strike="noStrike">
-                          <a:latin typeface="Times New Roman"/>
-                          <a:ea typeface="Times New Roman"/>
-                          <a:cs typeface="Times New Roman"/>
-                          <a:sym typeface="Times New Roman"/>
-                        </a:rPr>
-                        <a:t>Empirical evaluation of 5 frontier LLMs comparing open-source vs. closed-source code performance.</a:t>
-                      </a:r>
-                      <a:endParaRPr b="0" sz="1000" u="none" cap="none" strike="noStrike">
-                        <a:latin typeface="Times New Roman"/>
-                        <a:ea typeface="Times New Roman"/>
-                        <a:cs typeface="Times New Roman"/>
-                        <a:sym typeface="Times New Roman"/>
-                      </a:endParaRPr>
-                    </a:p>
-                  </a:txBody>
-                  <a:tcPr marT="45725" marB="45725" marR="91450" marL="91450"/>
-                </a:tc>
-                <a:tc>
-                  <a:txBody>
-                    <a:bodyPr/>
-                    <a:lstStyle/>
-                    <a:p>
-                      <a:pPr indent="0" lvl="0" marL="0" marR="0" rtl="0" algn="l">
-                        <a:spcBef>
-                          <a:spcPts val="0"/>
-                        </a:spcBef>
-                        <a:spcAft>
-                          <a:spcPts val="0"/>
-                        </a:spcAft>
-                        <a:buClr>
-                          <a:schemeClr val="dk1"/>
-                        </a:buClr>
-                        <a:buSzPts val="1000"/>
-                        <a:buFont typeface="Times New Roman"/>
-                        <a:buNone/>
-                      </a:pPr>
-                      <a:r>
-                        <a:rPr b="0" lang="en" sz="1000" u="none" cap="none" strike="noStrike">
-                          <a:latin typeface="Times New Roman"/>
-                          <a:ea typeface="Times New Roman"/>
-                          <a:cs typeface="Times New Roman"/>
-                          <a:sym typeface="Times New Roman"/>
-                        </a:rPr>
-                        <a:t>CWE-Bench-Java (Open) and TS-Vuls (Closed, commercial Teamscale codebase).</a:t>
-                      </a:r>
-                      <a:endParaRPr b="0" sz="1000" u="none" cap="none" strike="noStrike">
-                        <a:latin typeface="Times New Roman"/>
-                        <a:ea typeface="Times New Roman"/>
-                        <a:cs typeface="Times New Roman"/>
-                        <a:sym typeface="Times New Roman"/>
-                      </a:endParaRPr>
-                    </a:p>
-                  </a:txBody>
-                  <a:tcPr marT="45725" marB="45725" marR="91450" marL="91450"/>
-                </a:tc>
-                <a:tc>
-                  <a:txBody>
-                    <a:bodyPr/>
-                    <a:lstStyle/>
-                    <a:p>
-                      <a:pPr indent="0" lvl="0" marL="0" marR="0" rtl="0" algn="l">
-                        <a:spcBef>
-                          <a:spcPts val="0"/>
-                        </a:spcBef>
-                        <a:spcAft>
-                          <a:spcPts val="0"/>
-                        </a:spcAft>
-                        <a:buClr>
-                          <a:schemeClr val="dk1"/>
-                        </a:buClr>
-                        <a:buSzPts val="1000"/>
-                        <a:buFont typeface="Times New Roman"/>
-                        <a:buNone/>
-                      </a:pPr>
-                      <a:r>
-                        <a:rPr b="0" lang="en" sz="1000" u="none" cap="none" strike="noStrike">
-                          <a:latin typeface="Times New Roman"/>
-                          <a:ea typeface="Times New Roman"/>
-                          <a:cs typeface="Times New Roman"/>
-                          <a:sym typeface="Times New Roman"/>
-                        </a:rPr>
-                        <a:t>Precision dropped significantly from 56% on open-source code to 34% on closed-source code.</a:t>
-                      </a:r>
-                      <a:endParaRPr b="0" sz="1000" u="none" cap="none" strike="noStrike">
-                        <a:latin typeface="Times New Roman"/>
-                        <a:ea typeface="Times New Roman"/>
-                        <a:cs typeface="Times New Roman"/>
-                        <a:sym typeface="Times New Roman"/>
-                      </a:endParaRPr>
-                    </a:p>
-                  </a:txBody>
-                  <a:tcPr marT="45725" marB="45725" marR="91450" marL="91450"/>
-                </a:tc>
-                <a:tc>
-                  <a:txBody>
-                    <a:bodyPr/>
-                    <a:lstStyle/>
-                    <a:p>
-                      <a:pPr indent="0" lvl="0" marL="0" marR="0" rtl="0" algn="l">
-                        <a:spcBef>
-                          <a:spcPts val="0"/>
-                        </a:spcBef>
-                        <a:spcAft>
-                          <a:spcPts val="0"/>
-                        </a:spcAft>
-                        <a:buClr>
-                          <a:schemeClr val="dk1"/>
-                        </a:buClr>
-                        <a:buSzPts val="1000"/>
-                        <a:buFont typeface="Times New Roman"/>
-                        <a:buNone/>
-                      </a:pPr>
-                      <a:r>
-                        <a:rPr b="0" lang="en" sz="1000" u="none" cap="none" strike="noStrike">
-                          <a:latin typeface="Times New Roman"/>
-                          <a:ea typeface="Times New Roman"/>
-                          <a:cs typeface="Times New Roman"/>
-                          <a:sym typeface="Times New Roman"/>
-                        </a:rPr>
-                        <a:t>LLM metrics are heavily inflated on open-source data due to training contamination.</a:t>
-                      </a:r>
-                      <a:endParaRPr b="0" sz="1000" u="none" cap="none" strike="noStrike">
-                        <a:latin typeface="Times New Roman"/>
-                        <a:ea typeface="Times New Roman"/>
-                        <a:cs typeface="Times New Roman"/>
-                        <a:sym typeface="Times New Roman"/>
-                      </a:endParaRPr>
-                    </a:p>
-                  </a:txBody>
-                  <a:tcPr marT="45725" marB="45725" marR="91450" marL="91450"/>
-                </a:tc>
-              </a:tr>
-              <a:tr h="750575">
-                <a:tc>
-                  <a:txBody>
-                    <a:bodyPr/>
-                    <a:lstStyle/>
-                    <a:p>
-                      <a:pPr indent="0" lvl="0" marL="0" marR="0" rtl="0" algn="l">
-                        <a:spcBef>
-                          <a:spcPts val="0"/>
-                        </a:spcBef>
-                        <a:spcAft>
-                          <a:spcPts val="0"/>
-                        </a:spcAft>
-                        <a:buClr>
-                          <a:schemeClr val="dk1"/>
-                        </a:buClr>
-                        <a:buSzPts val="1000"/>
-                        <a:buFont typeface="Times New Roman"/>
-                        <a:buNone/>
-                      </a:pPr>
-                      <a:r>
-                        <a:rPr b="0" lang="en" sz="1000" u="none" cap="none" strike="noStrike">
-                          <a:latin typeface="Times New Roman"/>
-                          <a:ea typeface="Times New Roman"/>
-                          <a:cs typeface="Times New Roman"/>
-                          <a:sym typeface="Times New Roman"/>
-                        </a:rPr>
-                        <a:t>Guo et al. (2023)</a:t>
-                      </a:r>
-                      <a:endParaRPr b="0" sz="1000" u="none" cap="none" strike="noStrike">
-                        <a:latin typeface="Times New Roman"/>
-                        <a:ea typeface="Times New Roman"/>
-                        <a:cs typeface="Times New Roman"/>
-                        <a:sym typeface="Times New Roman"/>
-                      </a:endParaRPr>
-                    </a:p>
-                  </a:txBody>
-                  <a:tcPr marT="45725" marB="45725" marR="91450" marL="91450"/>
-                </a:tc>
-                <a:tc>
-                  <a:txBody>
-                    <a:bodyPr/>
-                    <a:lstStyle/>
-                    <a:p>
-                      <a:pPr indent="0" lvl="0" marL="0" marR="0" rtl="0" algn="l">
-                        <a:spcBef>
-                          <a:spcPts val="0"/>
-                        </a:spcBef>
-                        <a:spcAft>
-                          <a:spcPts val="0"/>
-                        </a:spcAft>
-                        <a:buClr>
-                          <a:schemeClr val="dk1"/>
-                        </a:buClr>
-                        <a:buSzPts val="1000"/>
-                        <a:buFont typeface="Times New Roman"/>
-                        <a:buNone/>
-                      </a:pPr>
-                      <a:r>
-                        <a:rPr b="0" lang="en" sz="1000" u="none" cap="none" strike="noStrike">
-                          <a:latin typeface="Times New Roman"/>
-                          <a:ea typeface="Times New Roman"/>
-                          <a:cs typeface="Times New Roman"/>
-                          <a:sym typeface="Times New Roman"/>
-                        </a:rPr>
-                        <a:t>Systematic review of 130 false positive mitigation studies across 5 technical categories.</a:t>
-                      </a:r>
-                      <a:endParaRPr b="0" sz="1000" u="none" cap="none" strike="noStrike">
-                        <a:latin typeface="Times New Roman"/>
-                        <a:ea typeface="Times New Roman"/>
-                        <a:cs typeface="Times New Roman"/>
-                        <a:sym typeface="Times New Roman"/>
-                      </a:endParaRPr>
-                    </a:p>
-                  </a:txBody>
-                  <a:tcPr marT="45725" marB="45725" marR="91450" marL="91450"/>
-                </a:tc>
-                <a:tc>
-                  <a:txBody>
-                    <a:bodyPr/>
-                    <a:lstStyle/>
-                    <a:p>
-                      <a:pPr indent="0" lvl="0" marL="0" marR="0" rtl="0" algn="l">
-                        <a:spcBef>
-                          <a:spcPts val="0"/>
-                        </a:spcBef>
-                        <a:spcAft>
-                          <a:spcPts val="0"/>
-                        </a:spcAft>
-                        <a:buClr>
-                          <a:schemeClr val="dk1"/>
-                        </a:buClr>
-                        <a:buSzPts val="1000"/>
-                        <a:buFont typeface="Times New Roman"/>
-                        <a:buNone/>
-                      </a:pPr>
-                      <a:r>
-                        <a:rPr b="0" lang="en" sz="1000" u="none" cap="none" strike="noStrike">
-                          <a:latin typeface="Times New Roman"/>
-                          <a:ea typeface="Times New Roman"/>
-                          <a:cs typeface="Times New Roman"/>
-                          <a:sym typeface="Times New Roman"/>
-                        </a:rPr>
-                        <a:t>N/A (Literature Review).</a:t>
-                      </a:r>
-                      <a:endParaRPr b="0" sz="1000" u="none" cap="none" strike="noStrike">
-                        <a:latin typeface="Times New Roman"/>
-                        <a:ea typeface="Times New Roman"/>
-                        <a:cs typeface="Times New Roman"/>
-                        <a:sym typeface="Times New Roman"/>
-                      </a:endParaRPr>
-                    </a:p>
-                  </a:txBody>
-                  <a:tcPr marT="45725" marB="45725" marR="91450" marL="91450"/>
-                </a:tc>
-                <a:tc>
-                  <a:txBody>
-                    <a:bodyPr/>
-                    <a:lstStyle/>
-                    <a:p>
-                      <a:pPr indent="0" lvl="0" marL="0" marR="0" rtl="0" algn="l">
-                        <a:spcBef>
-                          <a:spcPts val="0"/>
-                        </a:spcBef>
-                        <a:spcAft>
-                          <a:spcPts val="0"/>
-                        </a:spcAft>
-                        <a:buClr>
-                          <a:schemeClr val="dk1"/>
-                        </a:buClr>
-                        <a:buSzPts val="1000"/>
-                        <a:buFont typeface="Times New Roman"/>
-                        <a:buNone/>
-                      </a:pPr>
-                      <a:r>
-                        <a:rPr b="0" lang="en" sz="1000" u="none" cap="none" strike="noStrike">
-                          <a:latin typeface="Times New Roman"/>
-                          <a:ea typeface="Times New Roman"/>
-                          <a:cs typeface="Times New Roman"/>
-                          <a:sym typeface="Times New Roman"/>
-                        </a:rPr>
-                        <a:t>Established a taxonomy for false positive mitigation and identified deep learning and NLP as future directions.</a:t>
-                      </a:r>
-                      <a:endParaRPr b="0" sz="1000" u="none" cap="none" strike="noStrike">
-                        <a:latin typeface="Times New Roman"/>
-                        <a:ea typeface="Times New Roman"/>
-                        <a:cs typeface="Times New Roman"/>
-                        <a:sym typeface="Times New Roman"/>
-                      </a:endParaRPr>
-                    </a:p>
-                  </a:txBody>
-                  <a:tcPr marT="45725" marB="45725" marR="91450" marL="91450"/>
-                </a:tc>
-                <a:tc>
-                  <a:txBody>
-                    <a:bodyPr/>
-                    <a:lstStyle/>
-                    <a:p>
-                      <a:pPr indent="0" lvl="0" marL="0" marR="0" rtl="0" algn="l">
-                        <a:spcBef>
-                          <a:spcPts val="0"/>
-                        </a:spcBef>
-                        <a:spcAft>
-                          <a:spcPts val="0"/>
-                        </a:spcAft>
-                        <a:buClr>
-                          <a:schemeClr val="dk1"/>
-                        </a:buClr>
-                        <a:buSzPts val="1000"/>
-                        <a:buFont typeface="Times New Roman"/>
-                        <a:buNone/>
-                      </a:pPr>
-                      <a:r>
-                        <a:rPr b="0" lang="en" sz="1000" u="none" cap="none" strike="noStrike">
-                          <a:latin typeface="Times New Roman"/>
-                          <a:ea typeface="Times New Roman"/>
-                          <a:cs typeface="Times New Roman"/>
-                          <a:sym typeface="Times New Roman"/>
-                        </a:rPr>
-                        <a:t>Current approaches suffer from low explainability, ambiguous concept definitions, and dataset biases.</a:t>
-                      </a:r>
-                      <a:endParaRPr b="0" sz="1000" u="none" cap="none" strike="noStrike">
-                        <a:latin typeface="Times New Roman"/>
-                        <a:ea typeface="Times New Roman"/>
-                        <a:cs typeface="Times New Roman"/>
-                        <a:sym typeface="Times New Roman"/>
-                      </a:endParaRPr>
-                    </a:p>
-                  </a:txBody>
-                  <a:tcPr marT="45725" marB="45725" marR="91450" marL="91450"/>
+                  <a:tcPr marT="45725" marB="45725" marR="91450" marL="91450">
+                    <a:lnL cap="flat" cmpd="sng" w="12700">
+                      <a:solidFill>
+                        <a:srgbClr val="FFFFFF"/>
+                      </a:solidFill>
+                      <a:prstDash val="solid"/>
+                      <a:round/>
+                      <a:headEnd len="sm" w="sm" type="none"/>
+                      <a:tailEnd len="sm" w="sm" type="none"/>
+                    </a:lnL>
+                    <a:lnR cap="flat" cmpd="sng" w="12700">
+                      <a:solidFill>
+                        <a:srgbClr val="FFFFFF"/>
+                      </a:solidFill>
+                      <a:prstDash val="solid"/>
+                      <a:round/>
+                      <a:headEnd len="sm" w="sm" type="none"/>
+                      <a:tailEnd len="sm" w="sm" type="none"/>
+                    </a:lnR>
+                    <a:lnT cap="flat" cmpd="sng" w="12700">
+                      <a:solidFill>
+                        <a:srgbClr val="FFFFFF"/>
+                      </a:solidFill>
+                      <a:prstDash val="solid"/>
+                      <a:round/>
+                      <a:headEnd len="sm" w="sm" type="none"/>
+                      <a:tailEnd len="sm" w="sm" type="none"/>
+                    </a:lnT>
+                    <a:lnB cap="flat" cmpd="sng" w="38100">
+                      <a:solidFill>
+                        <a:srgbClr val="FFFFFF"/>
+                      </a:solidFill>
+                      <a:prstDash val="solid"/>
+                      <a:round/>
+                      <a:headEnd len="sm" w="sm" type="none"/>
+                      <a:tailEnd len="sm" w="sm" type="none"/>
+                    </a:lnB>
+                  </a:tcPr>
                 </a:tc>
               </a:tr>
             </a:tbl>
@@ -24189,7 +25119,7 @@
             <a:tbl>
               <a:tblPr bandRow="1" firstRow="1">
                 <a:noFill/>
-                <a:tableStyleId>{63AFD72F-D83C-49CB-ACC5-6D9350BFB6BF}</a:tableStyleId>
+                <a:tableStyleId>{6D9ABEBF-9BBF-4B88-B93A-B9F46CAE2BA6}</a:tableStyleId>
               </a:tblPr>
               <a:tblGrid>
                 <a:gridCol w="872025"/>
@@ -24212,7 +25142,7 @@
                           <a:spcPts val="0"/>
                         </a:spcAft>
                         <a:buClr>
-                          <a:schemeClr val="dk1"/>
+                          <a:srgbClr val="000000"/>
                         </a:buClr>
                         <a:buSzPts val="1400"/>
                         <a:buFont typeface="Times New Roman"/>
@@ -24235,7 +25165,44 @@
                       </a:endParaRPr>
                     </a:p>
                   </a:txBody>
-                  <a:tcPr marT="45725" marB="45725" marR="91450" marL="91450"/>
+                  <a:tcPr marT="45725" marB="45725" marR="91450" marL="91450">
+                    <a:lnL cap="flat" cmpd="sng" w="12700">
+                      <a:solidFill>
+                        <a:srgbClr val="FFFFFF"/>
+                      </a:solidFill>
+                      <a:prstDash val="solid"/>
+                      <a:round/>
+                      <a:headEnd len="sm" w="sm" type="none"/>
+                      <a:tailEnd len="sm" w="sm" type="none"/>
+                    </a:lnL>
+                    <a:lnR cap="flat" cmpd="sng" w="12700">
+                      <a:solidFill>
+                        <a:srgbClr val="FFFFFF"/>
+                      </a:solidFill>
+                      <a:prstDash val="solid"/>
+                      <a:round/>
+                      <a:headEnd len="sm" w="sm" type="none"/>
+                      <a:tailEnd len="sm" w="sm" type="none"/>
+                    </a:lnR>
+                    <a:lnT cap="flat" cmpd="sng" w="12700">
+                      <a:solidFill>
+                        <a:srgbClr val="FFFFFF"/>
+                      </a:solidFill>
+                      <a:prstDash val="solid"/>
+                      <a:round/>
+                      <a:headEnd len="sm" w="sm" type="none"/>
+                      <a:tailEnd len="sm" w="sm" type="none"/>
+                    </a:lnT>
+                    <a:lnB cap="flat" cmpd="sng" w="12700">
+                      <a:solidFill>
+                        <a:srgbClr val="FFFFFF"/>
+                      </a:solidFill>
+                      <a:prstDash val="solid"/>
+                      <a:round/>
+                      <a:headEnd len="sm" w="sm" type="none"/>
+                      <a:tailEnd len="sm" w="sm" type="none"/>
+                    </a:lnB>
+                  </a:tcPr>
                 </a:tc>
                 <a:tc>
                   <a:txBody>
@@ -24250,7 +25217,7 @@
                           <a:spcPts val="0"/>
                         </a:spcAft>
                         <a:buClr>
-                          <a:schemeClr val="dk1"/>
+                          <a:srgbClr val="000000"/>
                         </a:buClr>
                         <a:buSzPts val="1400"/>
                         <a:buFont typeface="Times New Roman"/>
@@ -24281,7 +25248,7 @@
                           <a:spcPts val="0"/>
                         </a:spcAft>
                         <a:buClr>
-                          <a:schemeClr val="dk1"/>
+                          <a:srgbClr val="000000"/>
                         </a:buClr>
                         <a:buSzPts val="1400"/>
                         <a:buFont typeface="Times New Roman"/>
@@ -24304,7 +25271,44 @@
                       </a:endParaRPr>
                     </a:p>
                   </a:txBody>
-                  <a:tcPr marT="45725" marB="45725" marR="91450" marL="91450"/>
+                  <a:tcPr marT="45725" marB="45725" marR="91450" marL="91450">
+                    <a:lnL cap="flat" cmpd="sng" w="12700">
+                      <a:solidFill>
+                        <a:srgbClr val="FFFFFF"/>
+                      </a:solidFill>
+                      <a:prstDash val="solid"/>
+                      <a:round/>
+                      <a:headEnd len="sm" w="sm" type="none"/>
+                      <a:tailEnd len="sm" w="sm" type="none"/>
+                    </a:lnL>
+                    <a:lnR cap="flat" cmpd="sng" w="12700">
+                      <a:solidFill>
+                        <a:srgbClr val="FFFFFF"/>
+                      </a:solidFill>
+                      <a:prstDash val="solid"/>
+                      <a:round/>
+                      <a:headEnd len="sm" w="sm" type="none"/>
+                      <a:tailEnd len="sm" w="sm" type="none"/>
+                    </a:lnR>
+                    <a:lnT cap="flat" cmpd="sng" w="12700">
+                      <a:solidFill>
+                        <a:srgbClr val="FFFFFF"/>
+                      </a:solidFill>
+                      <a:prstDash val="solid"/>
+                      <a:round/>
+                      <a:headEnd len="sm" w="sm" type="none"/>
+                      <a:tailEnd len="sm" w="sm" type="none"/>
+                    </a:lnT>
+                    <a:lnB cap="flat" cmpd="sng" w="12700">
+                      <a:solidFill>
+                        <a:srgbClr val="FFFFFF"/>
+                      </a:solidFill>
+                      <a:prstDash val="solid"/>
+                      <a:round/>
+                      <a:headEnd len="sm" w="sm" type="none"/>
+                      <a:tailEnd len="sm" w="sm" type="none"/>
+                    </a:lnB>
+                  </a:tcPr>
                 </a:tc>
                 <a:tc>
                   <a:txBody>
@@ -24319,7 +25323,7 @@
                           <a:spcPts val="0"/>
                         </a:spcAft>
                         <a:buClr>
-                          <a:schemeClr val="dk1"/>
+                          <a:srgbClr val="000000"/>
                         </a:buClr>
                         <a:buSzPts val="1400"/>
                         <a:buFont typeface="Times New Roman"/>
@@ -24342,7 +25346,44 @@
                       </a:endParaRPr>
                     </a:p>
                   </a:txBody>
-                  <a:tcPr marT="45725" marB="45725" marR="91450" marL="91450"/>
+                  <a:tcPr marT="45725" marB="45725" marR="91450" marL="91450">
+                    <a:lnL cap="flat" cmpd="sng" w="12700">
+                      <a:solidFill>
+                        <a:srgbClr val="FFFFFF"/>
+                      </a:solidFill>
+                      <a:prstDash val="solid"/>
+                      <a:round/>
+                      <a:headEnd len="sm" w="sm" type="none"/>
+                      <a:tailEnd len="sm" w="sm" type="none"/>
+                    </a:lnL>
+                    <a:lnR cap="flat" cmpd="sng" w="12700">
+                      <a:solidFill>
+                        <a:srgbClr val="FFFFFF"/>
+                      </a:solidFill>
+                      <a:prstDash val="solid"/>
+                      <a:round/>
+                      <a:headEnd len="sm" w="sm" type="none"/>
+                      <a:tailEnd len="sm" w="sm" type="none"/>
+                    </a:lnR>
+                    <a:lnT cap="flat" cmpd="sng" w="12700">
+                      <a:solidFill>
+                        <a:srgbClr val="FFFFFF"/>
+                      </a:solidFill>
+                      <a:prstDash val="solid"/>
+                      <a:round/>
+                      <a:headEnd len="sm" w="sm" type="none"/>
+                      <a:tailEnd len="sm" w="sm" type="none"/>
+                    </a:lnT>
+                    <a:lnB cap="flat" cmpd="sng" w="12700">
+                      <a:solidFill>
+                        <a:srgbClr val="FFFFFF"/>
+                      </a:solidFill>
+                      <a:prstDash val="solid"/>
+                      <a:round/>
+                      <a:headEnd len="sm" w="sm" type="none"/>
+                      <a:tailEnd len="sm" w="sm" type="none"/>
+                    </a:lnB>
+                  </a:tcPr>
                 </a:tc>
                 <a:tc>
                   <a:txBody>
@@ -24357,7 +25398,7 @@
                           <a:spcPts val="0"/>
                         </a:spcAft>
                         <a:buClr>
-                          <a:schemeClr val="dk1"/>
+                          <a:srgbClr val="000000"/>
                         </a:buClr>
                         <a:buSzPts val="1400"/>
                         <a:buFont typeface="Times New Roman"/>
@@ -24380,7 +25421,44 @@
                       </a:endParaRPr>
                     </a:p>
                   </a:txBody>
-                  <a:tcPr marT="45725" marB="45725" marR="91450" marL="91450"/>
+                  <a:tcPr marT="45725" marB="45725" marR="91450" marL="91450">
+                    <a:lnL cap="flat" cmpd="sng" w="12700">
+                      <a:solidFill>
+                        <a:srgbClr val="FFFFFF"/>
+                      </a:solidFill>
+                      <a:prstDash val="solid"/>
+                      <a:round/>
+                      <a:headEnd len="sm" w="sm" type="none"/>
+                      <a:tailEnd len="sm" w="sm" type="none"/>
+                    </a:lnL>
+                    <a:lnR cap="flat" cmpd="sng" w="12700">
+                      <a:solidFill>
+                        <a:srgbClr val="FFFFFF"/>
+                      </a:solidFill>
+                      <a:prstDash val="solid"/>
+                      <a:round/>
+                      <a:headEnd len="sm" w="sm" type="none"/>
+                      <a:tailEnd len="sm" w="sm" type="none"/>
+                    </a:lnR>
+                    <a:lnT cap="flat" cmpd="sng" w="12700">
+                      <a:solidFill>
+                        <a:srgbClr val="FFFFFF"/>
+                      </a:solidFill>
+                      <a:prstDash val="solid"/>
+                      <a:round/>
+                      <a:headEnd len="sm" w="sm" type="none"/>
+                      <a:tailEnd len="sm" w="sm" type="none"/>
+                    </a:lnT>
+                    <a:lnB cap="flat" cmpd="sng" w="12700">
+                      <a:solidFill>
+                        <a:srgbClr val="FFFFFF"/>
+                      </a:solidFill>
+                      <a:prstDash val="solid"/>
+                      <a:round/>
+                      <a:headEnd len="sm" w="sm" type="none"/>
+                      <a:tailEnd len="sm" w="sm" type="none"/>
+                    </a:lnB>
+                  </a:tcPr>
                 </a:tc>
                 <a:tc>
                   <a:txBody>
@@ -24395,7 +25473,7 @@
                           <a:spcPts val="0"/>
                         </a:spcAft>
                         <a:buClr>
-                          <a:schemeClr val="dk1"/>
+                          <a:srgbClr val="000000"/>
                         </a:buClr>
                         <a:buSzPts val="1400"/>
                         <a:buFont typeface="Times New Roman"/>
@@ -24418,7 +25496,44 @@
                       </a:endParaRPr>
                     </a:p>
                   </a:txBody>
-                  <a:tcPr marT="45725" marB="45725" marR="91450" marL="91450"/>
+                  <a:tcPr marT="45725" marB="45725" marR="91450" marL="91450">
+                    <a:lnL cap="flat" cmpd="sng" w="12700">
+                      <a:solidFill>
+                        <a:srgbClr val="FFFFFF"/>
+                      </a:solidFill>
+                      <a:prstDash val="solid"/>
+                      <a:round/>
+                      <a:headEnd len="sm" w="sm" type="none"/>
+                      <a:tailEnd len="sm" w="sm" type="none"/>
+                    </a:lnL>
+                    <a:lnR cap="flat" cmpd="sng" w="12700">
+                      <a:solidFill>
+                        <a:srgbClr val="FFFFFF"/>
+                      </a:solidFill>
+                      <a:prstDash val="solid"/>
+                      <a:round/>
+                      <a:headEnd len="sm" w="sm" type="none"/>
+                      <a:tailEnd len="sm" w="sm" type="none"/>
+                    </a:lnR>
+                    <a:lnT cap="flat" cmpd="sng" w="12700">
+                      <a:solidFill>
+                        <a:srgbClr val="FFFFFF"/>
+                      </a:solidFill>
+                      <a:prstDash val="solid"/>
+                      <a:round/>
+                      <a:headEnd len="sm" w="sm" type="none"/>
+                      <a:tailEnd len="sm" w="sm" type="none"/>
+                    </a:lnT>
+                    <a:lnB cap="flat" cmpd="sng" w="12700">
+                      <a:solidFill>
+                        <a:srgbClr val="FFFFFF"/>
+                      </a:solidFill>
+                      <a:prstDash val="solid"/>
+                      <a:round/>
+                      <a:headEnd len="sm" w="sm" type="none"/>
+                      <a:tailEnd len="sm" w="sm" type="none"/>
+                    </a:lnB>
+                  </a:tcPr>
                 </a:tc>
               </a:tr>
               <a:tr h="751200">
@@ -24435,7 +25550,7 @@
                           <a:spcPts val="0"/>
                         </a:spcAft>
                         <a:buClr>
-                          <a:schemeClr val="dk1"/>
+                          <a:srgbClr val="000000"/>
                         </a:buClr>
                         <a:buSzPts val="1000"/>
                         <a:buFont typeface="Times New Roman"/>
@@ -24448,7 +25563,7 @@
                           <a:cs typeface="Times New Roman"/>
                           <a:sym typeface="Times New Roman"/>
                         </a:rPr>
-                        <a:t>Li et al. (2025)</a:t>
+                        <a:t>Dozono et al. (2025)</a:t>
                       </a:r>
                       <a:endParaRPr b="0" sz="1000" u="none" cap="none" strike="noStrike">
                         <a:latin typeface="Times New Roman"/>
@@ -24458,7 +25573,44 @@
                       </a:endParaRPr>
                     </a:p>
                   </a:txBody>
-                  <a:tcPr marT="45725" marB="45725" marR="91450" marL="91450"/>
+                  <a:tcPr marT="45725" marB="45725" marR="91450" marL="91450">
+                    <a:lnL cap="flat" cmpd="sng" w="12700">
+                      <a:solidFill>
+                        <a:srgbClr val="FFFFFF"/>
+                      </a:solidFill>
+                      <a:prstDash val="solid"/>
+                      <a:round/>
+                      <a:headEnd len="sm" w="sm" type="none"/>
+                      <a:tailEnd len="sm" w="sm" type="none"/>
+                    </a:lnL>
+                    <a:lnR cap="flat" cmpd="sng" w="12700">
+                      <a:solidFill>
+                        <a:srgbClr val="FFFFFF"/>
+                      </a:solidFill>
+                      <a:prstDash val="solid"/>
+                      <a:round/>
+                      <a:headEnd len="sm" w="sm" type="none"/>
+                      <a:tailEnd len="sm" w="sm" type="none"/>
+                    </a:lnR>
+                    <a:lnT cap="flat" cmpd="sng" w="12700">
+                      <a:solidFill>
+                        <a:srgbClr val="FFFFFF"/>
+                      </a:solidFill>
+                      <a:prstDash val="solid"/>
+                      <a:round/>
+                      <a:headEnd len="sm" w="sm" type="none"/>
+                      <a:tailEnd len="sm" w="sm" type="none"/>
+                    </a:lnT>
+                    <a:lnB cap="flat" cmpd="sng" w="38100">
+                      <a:solidFill>
+                        <a:srgbClr val="FFFFFF"/>
+                      </a:solidFill>
+                      <a:prstDash val="solid"/>
+                      <a:round/>
+                      <a:headEnd len="sm" w="sm" type="none"/>
+                      <a:tailEnd len="sm" w="sm" type="none"/>
+                    </a:lnB>
+                  </a:tcPr>
                 </a:tc>
                 <a:tc>
                   <a:txBody>
@@ -24473,7 +25625,7 @@
                           <a:spcPts val="0"/>
                         </a:spcAft>
                         <a:buClr>
-                          <a:schemeClr val="dk1"/>
+                          <a:srgbClr val="000000"/>
                         </a:buClr>
                         <a:buSzPts val="1000"/>
                         <a:buFont typeface="Times New Roman"/>
@@ -24486,7 +25638,7 @@
                           <a:cs typeface="Times New Roman"/>
                           <a:sym typeface="Times New Roman"/>
                         </a:rPr>
-                        <a:t>Injecting vulnerability steering vectors into LLM activation layers without altering original parameters.</a:t>
+                        <a:t>Empirical evaluation of 5 frontier LLMs comparing open-source vs. closed-source code performance.</a:t>
                       </a:r>
                       <a:endParaRPr b="0" sz="1000" u="none" cap="none" strike="noStrike">
                         <a:latin typeface="Times New Roman"/>
@@ -24496,7 +25648,44 @@
                       </a:endParaRPr>
                     </a:p>
                   </a:txBody>
-                  <a:tcPr marT="45725" marB="45725" marR="91450" marL="91450"/>
+                  <a:tcPr marT="45725" marB="45725" marR="91450" marL="91450">
+                    <a:lnL cap="flat" cmpd="sng" w="12700">
+                      <a:solidFill>
+                        <a:srgbClr val="FFFFFF"/>
+                      </a:solidFill>
+                      <a:prstDash val="solid"/>
+                      <a:round/>
+                      <a:headEnd len="sm" w="sm" type="none"/>
+                      <a:tailEnd len="sm" w="sm" type="none"/>
+                    </a:lnL>
+                    <a:lnR cap="flat" cmpd="sng" w="12700">
+                      <a:solidFill>
+                        <a:srgbClr val="FFFFFF"/>
+                      </a:solidFill>
+                      <a:prstDash val="solid"/>
+                      <a:round/>
+                      <a:headEnd len="sm" w="sm" type="none"/>
+                      <a:tailEnd len="sm" w="sm" type="none"/>
+                    </a:lnR>
+                    <a:lnT cap="flat" cmpd="sng" w="12700">
+                      <a:solidFill>
+                        <a:srgbClr val="FFFFFF"/>
+                      </a:solidFill>
+                      <a:prstDash val="solid"/>
+                      <a:round/>
+                      <a:headEnd len="sm" w="sm" type="none"/>
+                      <a:tailEnd len="sm" w="sm" type="none"/>
+                    </a:lnT>
+                    <a:lnB cap="flat" cmpd="sng" w="38100">
+                      <a:solidFill>
+                        <a:srgbClr val="FFFFFF"/>
+                      </a:solidFill>
+                      <a:prstDash val="solid"/>
+                      <a:round/>
+                      <a:headEnd len="sm" w="sm" type="none"/>
+                      <a:tailEnd len="sm" w="sm" type="none"/>
+                    </a:lnB>
+                  </a:tcPr>
                 </a:tc>
                 <a:tc>
                   <a:txBody>
@@ -24511,7 +25700,7 @@
                           <a:spcPts val="0"/>
                         </a:spcAft>
                         <a:buClr>
-                          <a:schemeClr val="dk1"/>
+                          <a:srgbClr val="000000"/>
                         </a:buClr>
                         <a:buSzPts val="1000"/>
                         <a:buFont typeface="Times New Roman"/>
@@ -24524,7 +25713,7 @@
                           <a:cs typeface="Times New Roman"/>
                           <a:sym typeface="Times New Roman"/>
                         </a:rPr>
-                        <a:t>SARD, FFmpeg+Qemu, Reveal, REEF.</a:t>
+                        <a:t>CWE-Bench-Java (Open) and TS-Vuls (Closed, commercial Teamscale codebase).</a:t>
                       </a:r>
                       <a:endParaRPr b="0" sz="1000" u="none" cap="none" strike="noStrike">
                         <a:latin typeface="Times New Roman"/>
@@ -24534,7 +25723,44 @@
                       </a:endParaRPr>
                     </a:p>
                   </a:txBody>
-                  <a:tcPr marT="45725" marB="45725" marR="91450" marL="91450"/>
+                  <a:tcPr marT="45725" marB="45725" marR="91450" marL="91450">
+                    <a:lnL cap="flat" cmpd="sng" w="12700">
+                      <a:solidFill>
+                        <a:srgbClr val="FFFFFF"/>
+                      </a:solidFill>
+                      <a:prstDash val="solid"/>
+                      <a:round/>
+                      <a:headEnd len="sm" w="sm" type="none"/>
+                      <a:tailEnd len="sm" w="sm" type="none"/>
+                    </a:lnL>
+                    <a:lnR cap="flat" cmpd="sng" w="12700">
+                      <a:solidFill>
+                        <a:srgbClr val="FFFFFF"/>
+                      </a:solidFill>
+                      <a:prstDash val="solid"/>
+                      <a:round/>
+                      <a:headEnd len="sm" w="sm" type="none"/>
+                      <a:tailEnd len="sm" w="sm" type="none"/>
+                    </a:lnR>
+                    <a:lnT cap="flat" cmpd="sng" w="12700">
+                      <a:solidFill>
+                        <a:srgbClr val="FFFFFF"/>
+                      </a:solidFill>
+                      <a:prstDash val="solid"/>
+                      <a:round/>
+                      <a:headEnd len="sm" w="sm" type="none"/>
+                      <a:tailEnd len="sm" w="sm" type="none"/>
+                    </a:lnT>
+                    <a:lnB cap="flat" cmpd="sng" w="38100">
+                      <a:solidFill>
+                        <a:srgbClr val="FFFFFF"/>
+                      </a:solidFill>
+                      <a:prstDash val="solid"/>
+                      <a:round/>
+                      <a:headEnd len="sm" w="sm" type="none"/>
+                      <a:tailEnd len="sm" w="sm" type="none"/>
+                    </a:lnB>
+                  </a:tcPr>
                 </a:tc>
                 <a:tc>
                   <a:txBody>
@@ -24549,7 +25775,7 @@
                           <a:spcPts val="0"/>
                         </a:spcAft>
                         <a:buClr>
-                          <a:schemeClr val="dk1"/>
+                          <a:srgbClr val="000000"/>
                         </a:buClr>
                         <a:buSzPts val="1000"/>
                         <a:buFont typeface="Times New Roman"/>
@@ -24562,7 +25788,7 @@
                           <a:cs typeface="Times New Roman"/>
                           <a:sym typeface="Times New Roman"/>
                         </a:rPr>
-                        <a:t>Outperformed state-of-the-art methods with a 12.86% F1-score increase on real-world datasets.</a:t>
+                        <a:t>Precision dropped significantly from 56% on open-source code to 34% on closed-source code.</a:t>
                       </a:r>
                       <a:endParaRPr b="0" sz="1000" u="none" cap="none" strike="noStrike">
                         <a:latin typeface="Times New Roman"/>
@@ -24572,7 +25798,44 @@
                       </a:endParaRPr>
                     </a:p>
                   </a:txBody>
-                  <a:tcPr marT="45725" marB="45725" marR="91450" marL="91450"/>
+                  <a:tcPr marT="45725" marB="45725" marR="91450" marL="91450">
+                    <a:lnL cap="flat" cmpd="sng" w="12700">
+                      <a:solidFill>
+                        <a:srgbClr val="FFFFFF"/>
+                      </a:solidFill>
+                      <a:prstDash val="solid"/>
+                      <a:round/>
+                      <a:headEnd len="sm" w="sm" type="none"/>
+                      <a:tailEnd len="sm" w="sm" type="none"/>
+                    </a:lnL>
+                    <a:lnR cap="flat" cmpd="sng" w="12700">
+                      <a:solidFill>
+                        <a:srgbClr val="FFFFFF"/>
+                      </a:solidFill>
+                      <a:prstDash val="solid"/>
+                      <a:round/>
+                      <a:headEnd len="sm" w="sm" type="none"/>
+                      <a:tailEnd len="sm" w="sm" type="none"/>
+                    </a:lnR>
+                    <a:lnT cap="flat" cmpd="sng" w="12700">
+                      <a:solidFill>
+                        <a:srgbClr val="FFFFFF"/>
+                      </a:solidFill>
+                      <a:prstDash val="solid"/>
+                      <a:round/>
+                      <a:headEnd len="sm" w="sm" type="none"/>
+                      <a:tailEnd len="sm" w="sm" type="none"/>
+                    </a:lnT>
+                    <a:lnB cap="flat" cmpd="sng" w="38100">
+                      <a:solidFill>
+                        <a:srgbClr val="FFFFFF"/>
+                      </a:solidFill>
+                      <a:prstDash val="solid"/>
+                      <a:round/>
+                      <a:headEnd len="sm" w="sm" type="none"/>
+                      <a:tailEnd len="sm" w="sm" type="none"/>
+                    </a:lnB>
+                  </a:tcPr>
                 </a:tc>
                 <a:tc>
                   <a:txBody>
@@ -24587,7 +25850,7 @@
                           <a:spcPts val="0"/>
                         </a:spcAft>
                         <a:buClr>
-                          <a:schemeClr val="dk1"/>
+                          <a:srgbClr val="000000"/>
                         </a:buClr>
                         <a:buSzPts val="1000"/>
                         <a:buFont typeface="Times New Roman"/>
@@ -24600,7 +25863,7 @@
                           <a:cs typeface="Times New Roman"/>
                           <a:sym typeface="Times New Roman"/>
                         </a:rPr>
-                        <a:t>Existing representation methods focus on overall semantics instead of isolating specific vulnerability concepts.</a:t>
+                        <a:t>LLM metrics are heavily inflated on open-source data due to training contamination.</a:t>
                       </a:r>
                       <a:endParaRPr b="0" sz="1000" u="none" cap="none" strike="noStrike">
                         <a:latin typeface="Times New Roman"/>
@@ -24610,7 +25873,44 @@
                       </a:endParaRPr>
                     </a:p>
                   </a:txBody>
-                  <a:tcPr marT="45725" marB="45725" marR="91450" marL="91450"/>
+                  <a:tcPr marT="45725" marB="45725" marR="91450" marL="91450">
+                    <a:lnL cap="flat" cmpd="sng" w="12700">
+                      <a:solidFill>
+                        <a:srgbClr val="FFFFFF"/>
+                      </a:solidFill>
+                      <a:prstDash val="solid"/>
+                      <a:round/>
+                      <a:headEnd len="sm" w="sm" type="none"/>
+                      <a:tailEnd len="sm" w="sm" type="none"/>
+                    </a:lnL>
+                    <a:lnR cap="flat" cmpd="sng" w="12700">
+                      <a:solidFill>
+                        <a:srgbClr val="FFFFFF"/>
+                      </a:solidFill>
+                      <a:prstDash val="solid"/>
+                      <a:round/>
+                      <a:headEnd len="sm" w="sm" type="none"/>
+                      <a:tailEnd len="sm" w="sm" type="none"/>
+                    </a:lnR>
+                    <a:lnT cap="flat" cmpd="sng" w="12700">
+                      <a:solidFill>
+                        <a:srgbClr val="FFFFFF"/>
+                      </a:solidFill>
+                      <a:prstDash val="solid"/>
+                      <a:round/>
+                      <a:headEnd len="sm" w="sm" type="none"/>
+                      <a:tailEnd len="sm" w="sm" type="none"/>
+                    </a:lnT>
+                    <a:lnB cap="flat" cmpd="sng" w="38100">
+                      <a:solidFill>
+                        <a:srgbClr val="FFFFFF"/>
+                      </a:solidFill>
+                      <a:prstDash val="solid"/>
+                      <a:round/>
+                      <a:headEnd len="sm" w="sm" type="none"/>
+                      <a:tailEnd len="sm" w="sm" type="none"/>
+                    </a:lnB>
+                  </a:tcPr>
                 </a:tc>
               </a:tr>
               <a:tr h="750575">
@@ -24627,7 +25927,761 @@
                           <a:spcPts val="0"/>
                         </a:spcAft>
                         <a:buClr>
-                          <a:schemeClr val="dk1"/>
+                          <a:srgbClr val="000000"/>
+                        </a:buClr>
+                        <a:buSzPts val="1000"/>
+                        <a:buFont typeface="Times New Roman"/>
+                        <a:buNone/>
+                      </a:pPr>
+                      <a:r>
+                        <a:rPr b="0" lang="en" sz="1000" u="none" cap="none" strike="noStrike">
+                          <a:latin typeface="Times New Roman"/>
+                          <a:ea typeface="Times New Roman"/>
+                          <a:cs typeface="Times New Roman"/>
+                          <a:sym typeface="Times New Roman"/>
+                        </a:rPr>
+                        <a:t>Apostolidis et al. (2025)</a:t>
+                      </a:r>
+                      <a:endParaRPr b="0" sz="1000" u="none" cap="none" strike="noStrike">
+                        <a:latin typeface="Times New Roman"/>
+                        <a:ea typeface="Times New Roman"/>
+                        <a:cs typeface="Times New Roman"/>
+                        <a:sym typeface="Times New Roman"/>
+                      </a:endParaRPr>
+                    </a:p>
+                  </a:txBody>
+                  <a:tcPr marT="45725" marB="45725" marR="91450" marL="91450">
+                    <a:lnL cap="flat" cmpd="sng" w="12700">
+                      <a:solidFill>
+                        <a:srgbClr val="FFFFFF"/>
+                      </a:solidFill>
+                      <a:prstDash val="solid"/>
+                      <a:round/>
+                      <a:headEnd len="sm" w="sm" type="none"/>
+                      <a:tailEnd len="sm" w="sm" type="none"/>
+                    </a:lnL>
+                    <a:lnR cap="flat" cmpd="sng" w="12700">
+                      <a:solidFill>
+                        <a:srgbClr val="FFFFFF"/>
+                      </a:solidFill>
+                      <a:prstDash val="solid"/>
+                      <a:round/>
+                      <a:headEnd len="sm" w="sm" type="none"/>
+                      <a:tailEnd len="sm" w="sm" type="none"/>
+                    </a:lnR>
+                    <a:lnT cap="flat" cmpd="sng" w="38100">
+                      <a:solidFill>
+                        <a:srgbClr val="FFFFFF"/>
+                      </a:solidFill>
+                      <a:prstDash val="solid"/>
+                      <a:round/>
+                      <a:headEnd len="sm" w="sm" type="none"/>
+                      <a:tailEnd len="sm" w="sm" type="none"/>
+                    </a:lnT>
+                    <a:lnB cap="flat" cmpd="sng" w="12700">
+                      <a:solidFill>
+                        <a:srgbClr val="FFFFFF"/>
+                      </a:solidFill>
+                      <a:prstDash val="solid"/>
+                      <a:round/>
+                      <a:headEnd len="sm" w="sm" type="none"/>
+                      <a:tailEnd len="sm" w="sm" type="none"/>
+                    </a:lnB>
+                  </a:tcPr>
+                </a:tc>
+                <a:tc>
+                  <a:txBody>
+                    <a:bodyPr/>
+                    <a:lstStyle/>
+                    <a:p>
+                      <a:pPr indent="0" lvl="0" marL="0" marR="0" rtl="0" algn="l">
+                        <a:spcBef>
+                          <a:spcPts val="0"/>
+                        </a:spcBef>
+                        <a:spcAft>
+                          <a:spcPts val="0"/>
+                        </a:spcAft>
+                        <a:buClr>
+                          <a:srgbClr val="000000"/>
+                        </a:buClr>
+                        <a:buSzPts val="1000"/>
+                        <a:buFont typeface="Times New Roman"/>
+                        <a:buNone/>
+                      </a:pPr>
+                      <a:r>
+                        <a:rPr b="0" lang="en" sz="1000" u="none" cap="none" strike="noStrike">
+                          <a:latin typeface="Times New Roman"/>
+                          <a:ea typeface="Times New Roman"/>
+                          <a:cs typeface="Times New Roman"/>
+                          <a:sym typeface="Times New Roman"/>
+                        </a:rPr>
+                        <a:t>CppCheck static analysis filtered by a fine-tuned CodeBERT vulnerability prediction model.</a:t>
+                      </a:r>
+                      <a:endParaRPr b="0" sz="1000" u="none" cap="none" strike="noStrike">
+                        <a:latin typeface="Times New Roman"/>
+                        <a:ea typeface="Times New Roman"/>
+                        <a:cs typeface="Times New Roman"/>
+                        <a:sym typeface="Times New Roman"/>
+                      </a:endParaRPr>
+                    </a:p>
+                  </a:txBody>
+                  <a:tcPr marT="45725" marB="45725" marR="91450" marL="91450">
+                    <a:lnL cap="flat" cmpd="sng" w="12700">
+                      <a:solidFill>
+                        <a:srgbClr val="FFFFFF"/>
+                      </a:solidFill>
+                      <a:prstDash val="solid"/>
+                      <a:round/>
+                      <a:headEnd len="sm" w="sm" type="none"/>
+                      <a:tailEnd len="sm" w="sm" type="none"/>
+                    </a:lnL>
+                    <a:lnR cap="flat" cmpd="sng" w="12700">
+                      <a:solidFill>
+                        <a:srgbClr val="FFFFFF"/>
+                      </a:solidFill>
+                      <a:prstDash val="solid"/>
+                      <a:round/>
+                      <a:headEnd len="sm" w="sm" type="none"/>
+                      <a:tailEnd len="sm" w="sm" type="none"/>
+                    </a:lnR>
+                    <a:lnT cap="flat" cmpd="sng" w="38100">
+                      <a:solidFill>
+                        <a:srgbClr val="FFFFFF"/>
+                      </a:solidFill>
+                      <a:prstDash val="solid"/>
+                      <a:round/>
+                      <a:headEnd len="sm" w="sm" type="none"/>
+                      <a:tailEnd len="sm" w="sm" type="none"/>
+                    </a:lnT>
+                    <a:lnB cap="flat" cmpd="sng" w="12700">
+                      <a:solidFill>
+                        <a:srgbClr val="FFFFFF"/>
+                      </a:solidFill>
+                      <a:prstDash val="solid"/>
+                      <a:round/>
+                      <a:headEnd len="sm" w="sm" type="none"/>
+                      <a:tailEnd len="sm" w="sm" type="none"/>
+                    </a:lnB>
+                  </a:tcPr>
+                </a:tc>
+                <a:tc>
+                  <a:txBody>
+                    <a:bodyPr/>
+                    <a:lstStyle/>
+                    <a:p>
+                      <a:pPr indent="0" lvl="0" marL="0" marR="0" rtl="0" algn="l">
+                        <a:spcBef>
+                          <a:spcPts val="0"/>
+                        </a:spcBef>
+                        <a:spcAft>
+                          <a:spcPts val="0"/>
+                        </a:spcAft>
+                        <a:buClr>
+                          <a:srgbClr val="000000"/>
+                        </a:buClr>
+                        <a:buSzPts val="1000"/>
+                        <a:buFont typeface="Times New Roman"/>
+                        <a:buNone/>
+                      </a:pPr>
+                      <a:r>
+                        <a:rPr b="0" lang="en" sz="1000" u="none" cap="none" strike="noStrike">
+                          <a:latin typeface="Times New Roman"/>
+                          <a:ea typeface="Times New Roman"/>
+                          <a:cs typeface="Times New Roman"/>
+                          <a:sym typeface="Times New Roman"/>
+                        </a:rPr>
+                        <a:t>Big-Vul and ReVeal (C/C++ GitHub samples).</a:t>
+                      </a:r>
+                      <a:endParaRPr b="0" sz="1000" u="none" cap="none" strike="noStrike">
+                        <a:latin typeface="Times New Roman"/>
+                        <a:ea typeface="Times New Roman"/>
+                        <a:cs typeface="Times New Roman"/>
+                        <a:sym typeface="Times New Roman"/>
+                      </a:endParaRPr>
+                    </a:p>
+                  </a:txBody>
+                  <a:tcPr marT="45725" marB="45725" marR="91450" marL="91450">
+                    <a:lnL cap="flat" cmpd="sng" w="12700">
+                      <a:solidFill>
+                        <a:srgbClr val="FFFFFF"/>
+                      </a:solidFill>
+                      <a:prstDash val="solid"/>
+                      <a:round/>
+                      <a:headEnd len="sm" w="sm" type="none"/>
+                      <a:tailEnd len="sm" w="sm" type="none"/>
+                    </a:lnL>
+                    <a:lnR cap="flat" cmpd="sng" w="12700">
+                      <a:solidFill>
+                        <a:srgbClr val="FFFFFF"/>
+                      </a:solidFill>
+                      <a:prstDash val="solid"/>
+                      <a:round/>
+                      <a:headEnd len="sm" w="sm" type="none"/>
+                      <a:tailEnd len="sm" w="sm" type="none"/>
+                    </a:lnR>
+                    <a:lnT cap="flat" cmpd="sng" w="38100">
+                      <a:solidFill>
+                        <a:srgbClr val="FFFFFF"/>
+                      </a:solidFill>
+                      <a:prstDash val="solid"/>
+                      <a:round/>
+                      <a:headEnd len="sm" w="sm" type="none"/>
+                      <a:tailEnd len="sm" w="sm" type="none"/>
+                    </a:lnT>
+                    <a:lnB cap="flat" cmpd="sng" w="12700">
+                      <a:solidFill>
+                        <a:srgbClr val="FFFFFF"/>
+                      </a:solidFill>
+                      <a:prstDash val="solid"/>
+                      <a:round/>
+                      <a:headEnd len="sm" w="sm" type="none"/>
+                      <a:tailEnd len="sm" w="sm" type="none"/>
+                    </a:lnB>
+                  </a:tcPr>
+                </a:tc>
+                <a:tc>
+                  <a:txBody>
+                    <a:bodyPr/>
+                    <a:lstStyle/>
+                    <a:p>
+                      <a:pPr indent="0" lvl="0" marL="0" marR="0" rtl="0" algn="l">
+                        <a:spcBef>
+                          <a:spcPts val="0"/>
+                        </a:spcBef>
+                        <a:spcAft>
+                          <a:spcPts val="0"/>
+                        </a:spcAft>
+                        <a:buClr>
+                          <a:srgbClr val="000000"/>
+                        </a:buClr>
+                        <a:buSzPts val="1000"/>
+                        <a:buFont typeface="Times New Roman"/>
+                        <a:buNone/>
+                      </a:pPr>
+                      <a:r>
+                        <a:rPr b="0" lang="en" sz="1000" u="none" cap="none" strike="noStrike">
+                          <a:latin typeface="Times New Roman"/>
+                          <a:ea typeface="Times New Roman"/>
+                          <a:cs typeface="Times New Roman"/>
+                          <a:sym typeface="Times New Roman"/>
+                        </a:rPr>
+                        <a:t>Reduced false positives, improving static analysis practicality with minimal impact on detection accuracy.</a:t>
+                      </a:r>
+                      <a:endParaRPr b="0" sz="1000" u="none" cap="none" strike="noStrike">
+                        <a:latin typeface="Times New Roman"/>
+                        <a:ea typeface="Times New Roman"/>
+                        <a:cs typeface="Times New Roman"/>
+                        <a:sym typeface="Times New Roman"/>
+                      </a:endParaRPr>
+                    </a:p>
+                  </a:txBody>
+                  <a:tcPr marT="45725" marB="45725" marR="91450" marL="91450">
+                    <a:lnL cap="flat" cmpd="sng" w="12700">
+                      <a:solidFill>
+                        <a:srgbClr val="FFFFFF"/>
+                      </a:solidFill>
+                      <a:prstDash val="solid"/>
+                      <a:round/>
+                      <a:headEnd len="sm" w="sm" type="none"/>
+                      <a:tailEnd len="sm" w="sm" type="none"/>
+                    </a:lnL>
+                    <a:lnR cap="flat" cmpd="sng" w="12700">
+                      <a:solidFill>
+                        <a:srgbClr val="FFFFFF"/>
+                      </a:solidFill>
+                      <a:prstDash val="solid"/>
+                      <a:round/>
+                      <a:headEnd len="sm" w="sm" type="none"/>
+                      <a:tailEnd len="sm" w="sm" type="none"/>
+                    </a:lnR>
+                    <a:lnT cap="flat" cmpd="sng" w="38100">
+                      <a:solidFill>
+                        <a:srgbClr val="FFFFFF"/>
+                      </a:solidFill>
+                      <a:prstDash val="solid"/>
+                      <a:round/>
+                      <a:headEnd len="sm" w="sm" type="none"/>
+                      <a:tailEnd len="sm" w="sm" type="none"/>
+                    </a:lnT>
+                    <a:lnB cap="flat" cmpd="sng" w="12700">
+                      <a:solidFill>
+                        <a:srgbClr val="FFFFFF"/>
+                      </a:solidFill>
+                      <a:prstDash val="solid"/>
+                      <a:round/>
+                      <a:headEnd len="sm" w="sm" type="none"/>
+                      <a:tailEnd len="sm" w="sm" type="none"/>
+                    </a:lnB>
+                  </a:tcPr>
+                </a:tc>
+                <a:tc>
+                  <a:txBody>
+                    <a:bodyPr/>
+                    <a:lstStyle/>
+                    <a:p>
+                      <a:pPr indent="0" lvl="0" marL="0" marR="0" rtl="0" algn="l">
+                        <a:spcBef>
+                          <a:spcPts val="0"/>
+                        </a:spcBef>
+                        <a:spcAft>
+                          <a:spcPts val="0"/>
+                        </a:spcAft>
+                        <a:buClr>
+                          <a:srgbClr val="000000"/>
+                        </a:buClr>
+                        <a:buSzPts val="1000"/>
+                        <a:buFont typeface="Times New Roman"/>
+                        <a:buNone/>
+                      </a:pPr>
+                      <a:r>
+                        <a:rPr b="0" lang="en" sz="1000" u="none" cap="none" strike="noStrike">
+                          <a:latin typeface="Times New Roman"/>
+                          <a:ea typeface="Times New Roman"/>
+                          <a:cs typeface="Times New Roman"/>
+                          <a:sym typeface="Times New Roman"/>
+                        </a:rPr>
+                        <a:t>Vulnerability prediction models lack line-level granularity; static tools suffer from overwhelming false alarms.</a:t>
+                      </a:r>
+                      <a:endParaRPr b="0" sz="1000" u="none" cap="none" strike="noStrike">
+                        <a:latin typeface="Times New Roman"/>
+                        <a:ea typeface="Times New Roman"/>
+                        <a:cs typeface="Times New Roman"/>
+                        <a:sym typeface="Times New Roman"/>
+                      </a:endParaRPr>
+                    </a:p>
+                  </a:txBody>
+                  <a:tcPr marT="45725" marB="45725" marR="91450" marL="91450">
+                    <a:lnL cap="flat" cmpd="sng" w="12700">
+                      <a:solidFill>
+                        <a:srgbClr val="FFFFFF"/>
+                      </a:solidFill>
+                      <a:prstDash val="solid"/>
+                      <a:round/>
+                      <a:headEnd len="sm" w="sm" type="none"/>
+                      <a:tailEnd len="sm" w="sm" type="none"/>
+                    </a:lnL>
+                    <a:lnR cap="flat" cmpd="sng" w="12700">
+                      <a:solidFill>
+                        <a:srgbClr val="FFFFFF"/>
+                      </a:solidFill>
+                      <a:prstDash val="solid"/>
+                      <a:round/>
+                      <a:headEnd len="sm" w="sm" type="none"/>
+                      <a:tailEnd len="sm" w="sm" type="none"/>
+                    </a:lnR>
+                    <a:lnT cap="flat" cmpd="sng" w="38100">
+                      <a:solidFill>
+                        <a:srgbClr val="FFFFFF"/>
+                      </a:solidFill>
+                      <a:prstDash val="solid"/>
+                      <a:round/>
+                      <a:headEnd len="sm" w="sm" type="none"/>
+                      <a:tailEnd len="sm" w="sm" type="none"/>
+                    </a:lnT>
+                    <a:lnB cap="flat" cmpd="sng" w="12700">
+                      <a:solidFill>
+                        <a:srgbClr val="FFFFFF"/>
+                      </a:solidFill>
+                      <a:prstDash val="solid"/>
+                      <a:round/>
+                      <a:headEnd len="sm" w="sm" type="none"/>
+                      <a:tailEnd len="sm" w="sm" type="none"/>
+                    </a:lnB>
+                  </a:tcPr>
+                </a:tc>
+              </a:tr>
+              <a:tr h="751200">
+                <a:tc>
+                  <a:txBody>
+                    <a:bodyPr/>
+                    <a:lstStyle/>
+                    <a:p>
+                      <a:pPr indent="0" lvl="0" marL="0" marR="0" rtl="0" algn="l">
+                        <a:spcBef>
+                          <a:spcPts val="0"/>
+                        </a:spcBef>
+                        <a:spcAft>
+                          <a:spcPts val="0"/>
+                        </a:spcAft>
+                        <a:buClr>
+                          <a:srgbClr val="000000"/>
+                        </a:buClr>
+                        <a:buSzPts val="1000"/>
+                        <a:buFont typeface="Times New Roman"/>
+                        <a:buNone/>
+                      </a:pPr>
+                      <a:r>
+                        <a:rPr b="0" lang="en" sz="1000" u="none" cap="none" strike="noStrike">
+                          <a:latin typeface="Times New Roman"/>
+                          <a:ea typeface="Times New Roman"/>
+                          <a:cs typeface="Times New Roman"/>
+                          <a:sym typeface="Times New Roman"/>
+                        </a:rPr>
+                        <a:t>Dozono et al. (2025)</a:t>
+                      </a:r>
+                      <a:endParaRPr b="0" sz="1000" u="none" cap="none" strike="noStrike">
+                        <a:latin typeface="Times New Roman"/>
+                        <a:ea typeface="Times New Roman"/>
+                        <a:cs typeface="Times New Roman"/>
+                        <a:sym typeface="Times New Roman"/>
+                      </a:endParaRPr>
+                    </a:p>
+                  </a:txBody>
+                  <a:tcPr marT="45725" marB="45725" marR="91450" marL="91450">
+                    <a:lnL cap="flat" cmpd="sng" w="12700">
+                      <a:solidFill>
+                        <a:srgbClr val="FFFFFF"/>
+                      </a:solidFill>
+                      <a:prstDash val="solid"/>
+                      <a:round/>
+                      <a:headEnd len="sm" w="sm" type="none"/>
+                      <a:tailEnd len="sm" w="sm" type="none"/>
+                    </a:lnL>
+                    <a:lnR cap="flat" cmpd="sng" w="12700">
+                      <a:solidFill>
+                        <a:srgbClr val="FFFFFF"/>
+                      </a:solidFill>
+                      <a:prstDash val="solid"/>
+                      <a:round/>
+                      <a:headEnd len="sm" w="sm" type="none"/>
+                      <a:tailEnd len="sm" w="sm" type="none"/>
+                    </a:lnR>
+                    <a:lnT cap="flat" cmpd="sng" w="12700">
+                      <a:solidFill>
+                        <a:srgbClr val="FFFFFF"/>
+                      </a:solidFill>
+                      <a:prstDash val="solid"/>
+                      <a:round/>
+                      <a:headEnd len="sm" w="sm" type="none"/>
+                      <a:tailEnd len="sm" w="sm" type="none"/>
+                    </a:lnT>
+                    <a:lnB cap="flat" cmpd="sng" w="38100">
+                      <a:solidFill>
+                        <a:srgbClr val="FFFFFF"/>
+                      </a:solidFill>
+                      <a:prstDash val="solid"/>
+                      <a:round/>
+                      <a:headEnd len="sm" w="sm" type="none"/>
+                      <a:tailEnd len="sm" w="sm" type="none"/>
+                    </a:lnB>
+                  </a:tcPr>
+                </a:tc>
+                <a:tc>
+                  <a:txBody>
+                    <a:bodyPr/>
+                    <a:lstStyle/>
+                    <a:p>
+                      <a:pPr indent="0" lvl="0" marL="0" marR="0" rtl="0" algn="l">
+                        <a:spcBef>
+                          <a:spcPts val="0"/>
+                        </a:spcBef>
+                        <a:spcAft>
+                          <a:spcPts val="0"/>
+                        </a:spcAft>
+                        <a:buClr>
+                          <a:srgbClr val="000000"/>
+                        </a:buClr>
+                        <a:buSzPts val="1000"/>
+                        <a:buFont typeface="Times New Roman"/>
+                        <a:buNone/>
+                      </a:pPr>
+                      <a:r>
+                        <a:rPr b="0" lang="en" sz="1000" u="none" cap="none" strike="noStrike">
+                          <a:latin typeface="Times New Roman"/>
+                          <a:ea typeface="Times New Roman"/>
+                          <a:cs typeface="Times New Roman"/>
+                          <a:sym typeface="Times New Roman"/>
+                        </a:rPr>
+                        <a:t>Empirical evaluation of 5 frontier LLMs comparing open-source vs. closed-source code performance.</a:t>
+                      </a:r>
+                      <a:endParaRPr b="0" sz="1000" u="none" cap="none" strike="noStrike">
+                        <a:latin typeface="Times New Roman"/>
+                        <a:ea typeface="Times New Roman"/>
+                        <a:cs typeface="Times New Roman"/>
+                        <a:sym typeface="Times New Roman"/>
+                      </a:endParaRPr>
+                    </a:p>
+                  </a:txBody>
+                  <a:tcPr marT="45725" marB="45725" marR="91450" marL="91450">
+                    <a:lnL cap="flat" cmpd="sng" w="12700">
+                      <a:solidFill>
+                        <a:srgbClr val="FFFFFF"/>
+                      </a:solidFill>
+                      <a:prstDash val="solid"/>
+                      <a:round/>
+                      <a:headEnd len="sm" w="sm" type="none"/>
+                      <a:tailEnd len="sm" w="sm" type="none"/>
+                    </a:lnL>
+                    <a:lnR cap="flat" cmpd="sng" w="12700">
+                      <a:solidFill>
+                        <a:srgbClr val="FFFFFF"/>
+                      </a:solidFill>
+                      <a:prstDash val="solid"/>
+                      <a:round/>
+                      <a:headEnd len="sm" w="sm" type="none"/>
+                      <a:tailEnd len="sm" w="sm" type="none"/>
+                    </a:lnR>
+                    <a:lnT cap="flat" cmpd="sng" w="12700">
+                      <a:solidFill>
+                        <a:srgbClr val="FFFFFF"/>
+                      </a:solidFill>
+                      <a:prstDash val="solid"/>
+                      <a:round/>
+                      <a:headEnd len="sm" w="sm" type="none"/>
+                      <a:tailEnd len="sm" w="sm" type="none"/>
+                    </a:lnT>
+                    <a:lnB cap="flat" cmpd="sng" w="38100">
+                      <a:solidFill>
+                        <a:srgbClr val="FFFFFF"/>
+                      </a:solidFill>
+                      <a:prstDash val="solid"/>
+                      <a:round/>
+                      <a:headEnd len="sm" w="sm" type="none"/>
+                      <a:tailEnd len="sm" w="sm" type="none"/>
+                    </a:lnB>
+                  </a:tcPr>
+                </a:tc>
+                <a:tc>
+                  <a:txBody>
+                    <a:bodyPr/>
+                    <a:lstStyle/>
+                    <a:p>
+                      <a:pPr indent="0" lvl="0" marL="0" marR="0" rtl="0" algn="l">
+                        <a:spcBef>
+                          <a:spcPts val="0"/>
+                        </a:spcBef>
+                        <a:spcAft>
+                          <a:spcPts val="0"/>
+                        </a:spcAft>
+                        <a:buClr>
+                          <a:srgbClr val="000000"/>
+                        </a:buClr>
+                        <a:buSzPts val="1000"/>
+                        <a:buFont typeface="Times New Roman"/>
+                        <a:buNone/>
+                      </a:pPr>
+                      <a:r>
+                        <a:rPr b="0" lang="en" sz="1000" u="none" cap="none" strike="noStrike">
+                          <a:latin typeface="Times New Roman"/>
+                          <a:ea typeface="Times New Roman"/>
+                          <a:cs typeface="Times New Roman"/>
+                          <a:sym typeface="Times New Roman"/>
+                        </a:rPr>
+                        <a:t>CWE-Bench-Java (Open) and TS-Vuls (Closed, commercial Teamscale codebase).</a:t>
+                      </a:r>
+                      <a:endParaRPr b="0" sz="1000" u="none" cap="none" strike="noStrike">
+                        <a:latin typeface="Times New Roman"/>
+                        <a:ea typeface="Times New Roman"/>
+                        <a:cs typeface="Times New Roman"/>
+                        <a:sym typeface="Times New Roman"/>
+                      </a:endParaRPr>
+                    </a:p>
+                  </a:txBody>
+                  <a:tcPr marT="45725" marB="45725" marR="91450" marL="91450">
+                    <a:lnL cap="flat" cmpd="sng" w="12700">
+                      <a:solidFill>
+                        <a:srgbClr val="FFFFFF"/>
+                      </a:solidFill>
+                      <a:prstDash val="solid"/>
+                      <a:round/>
+                      <a:headEnd len="sm" w="sm" type="none"/>
+                      <a:tailEnd len="sm" w="sm" type="none"/>
+                    </a:lnL>
+                    <a:lnR cap="flat" cmpd="sng" w="12700">
+                      <a:solidFill>
+                        <a:srgbClr val="FFFFFF"/>
+                      </a:solidFill>
+                      <a:prstDash val="solid"/>
+                      <a:round/>
+                      <a:headEnd len="sm" w="sm" type="none"/>
+                      <a:tailEnd len="sm" w="sm" type="none"/>
+                    </a:lnR>
+                    <a:lnT cap="flat" cmpd="sng" w="12700">
+                      <a:solidFill>
+                        <a:srgbClr val="FFFFFF"/>
+                      </a:solidFill>
+                      <a:prstDash val="solid"/>
+                      <a:round/>
+                      <a:headEnd len="sm" w="sm" type="none"/>
+                      <a:tailEnd len="sm" w="sm" type="none"/>
+                    </a:lnT>
+                    <a:lnB cap="flat" cmpd="sng" w="38100">
+                      <a:solidFill>
+                        <a:srgbClr val="FFFFFF"/>
+                      </a:solidFill>
+                      <a:prstDash val="solid"/>
+                      <a:round/>
+                      <a:headEnd len="sm" w="sm" type="none"/>
+                      <a:tailEnd len="sm" w="sm" type="none"/>
+                    </a:lnB>
+                  </a:tcPr>
+                </a:tc>
+                <a:tc>
+                  <a:txBody>
+                    <a:bodyPr/>
+                    <a:lstStyle/>
+                    <a:p>
+                      <a:pPr indent="0" lvl="0" marL="0" marR="0" rtl="0" algn="l">
+                        <a:spcBef>
+                          <a:spcPts val="0"/>
+                        </a:spcBef>
+                        <a:spcAft>
+                          <a:spcPts val="0"/>
+                        </a:spcAft>
+                        <a:buClr>
+                          <a:srgbClr val="000000"/>
+                        </a:buClr>
+                        <a:buSzPts val="1000"/>
+                        <a:buFont typeface="Times New Roman"/>
+                        <a:buNone/>
+                      </a:pPr>
+                      <a:r>
+                        <a:rPr b="0" lang="en" sz="1000" u="none" cap="none" strike="noStrike">
+                          <a:latin typeface="Times New Roman"/>
+                          <a:ea typeface="Times New Roman"/>
+                          <a:cs typeface="Times New Roman"/>
+                          <a:sym typeface="Times New Roman"/>
+                        </a:rPr>
+                        <a:t>Precision dropped significantly from 56% on open-source code to 34% on closed-source code.</a:t>
+                      </a:r>
+                      <a:endParaRPr b="0" sz="1000" u="none" cap="none" strike="noStrike">
+                        <a:latin typeface="Times New Roman"/>
+                        <a:ea typeface="Times New Roman"/>
+                        <a:cs typeface="Times New Roman"/>
+                        <a:sym typeface="Times New Roman"/>
+                      </a:endParaRPr>
+                    </a:p>
+                  </a:txBody>
+                  <a:tcPr marT="45725" marB="45725" marR="91450" marL="91450">
+                    <a:lnL cap="flat" cmpd="sng" w="12700">
+                      <a:solidFill>
+                        <a:srgbClr val="FFFFFF"/>
+                      </a:solidFill>
+                      <a:prstDash val="solid"/>
+                      <a:round/>
+                      <a:headEnd len="sm" w="sm" type="none"/>
+                      <a:tailEnd len="sm" w="sm" type="none"/>
+                    </a:lnL>
+                    <a:lnR cap="flat" cmpd="sng" w="12700">
+                      <a:solidFill>
+                        <a:srgbClr val="FFFFFF"/>
+                      </a:solidFill>
+                      <a:prstDash val="solid"/>
+                      <a:round/>
+                      <a:headEnd len="sm" w="sm" type="none"/>
+                      <a:tailEnd len="sm" w="sm" type="none"/>
+                    </a:lnR>
+                    <a:lnT cap="flat" cmpd="sng" w="12700">
+                      <a:solidFill>
+                        <a:srgbClr val="FFFFFF"/>
+                      </a:solidFill>
+                      <a:prstDash val="solid"/>
+                      <a:round/>
+                      <a:headEnd len="sm" w="sm" type="none"/>
+                      <a:tailEnd len="sm" w="sm" type="none"/>
+                    </a:lnT>
+                    <a:lnB cap="flat" cmpd="sng" w="38100">
+                      <a:solidFill>
+                        <a:srgbClr val="FFFFFF"/>
+                      </a:solidFill>
+                      <a:prstDash val="solid"/>
+                      <a:round/>
+                      <a:headEnd len="sm" w="sm" type="none"/>
+                      <a:tailEnd len="sm" w="sm" type="none"/>
+                    </a:lnB>
+                  </a:tcPr>
+                </a:tc>
+                <a:tc>
+                  <a:txBody>
+                    <a:bodyPr/>
+                    <a:lstStyle/>
+                    <a:p>
+                      <a:pPr indent="0" lvl="0" marL="0" marR="0" rtl="0" algn="l">
+                        <a:spcBef>
+                          <a:spcPts val="0"/>
+                        </a:spcBef>
+                        <a:spcAft>
+                          <a:spcPts val="0"/>
+                        </a:spcAft>
+                        <a:buClr>
+                          <a:srgbClr val="000000"/>
+                        </a:buClr>
+                        <a:buSzPts val="1000"/>
+                        <a:buFont typeface="Times New Roman"/>
+                        <a:buNone/>
+                      </a:pPr>
+                      <a:r>
+                        <a:rPr b="0" lang="en" sz="1000" u="none" cap="none" strike="noStrike">
+                          <a:latin typeface="Times New Roman"/>
+                          <a:ea typeface="Times New Roman"/>
+                          <a:cs typeface="Times New Roman"/>
+                          <a:sym typeface="Times New Roman"/>
+                        </a:rPr>
+                        <a:t>LLM metrics are heavily inflated on open-source data due to training contamination.</a:t>
+                      </a:r>
+                      <a:endParaRPr b="0" sz="1000" u="none" cap="none" strike="noStrike">
+                        <a:latin typeface="Times New Roman"/>
+                        <a:ea typeface="Times New Roman"/>
+                        <a:cs typeface="Times New Roman"/>
+                        <a:sym typeface="Times New Roman"/>
+                      </a:endParaRPr>
+                    </a:p>
+                  </a:txBody>
+                  <a:tcPr marT="45725" marB="45725" marR="91450" marL="91450">
+                    <a:lnL cap="flat" cmpd="sng" w="12700">
+                      <a:solidFill>
+                        <a:srgbClr val="FFFFFF"/>
+                      </a:solidFill>
+                      <a:prstDash val="solid"/>
+                      <a:round/>
+                      <a:headEnd len="sm" w="sm" type="none"/>
+                      <a:tailEnd len="sm" w="sm" type="none"/>
+                    </a:lnL>
+                    <a:lnR cap="flat" cmpd="sng" w="12700">
+                      <a:solidFill>
+                        <a:srgbClr val="FFFFFF"/>
+                      </a:solidFill>
+                      <a:prstDash val="solid"/>
+                      <a:round/>
+                      <a:headEnd len="sm" w="sm" type="none"/>
+                      <a:tailEnd len="sm" w="sm" type="none"/>
+                    </a:lnR>
+                    <a:lnT cap="flat" cmpd="sng" w="12700">
+                      <a:solidFill>
+                        <a:srgbClr val="FFFFFF"/>
+                      </a:solidFill>
+                      <a:prstDash val="solid"/>
+                      <a:round/>
+                      <a:headEnd len="sm" w="sm" type="none"/>
+                      <a:tailEnd len="sm" w="sm" type="none"/>
+                    </a:lnT>
+                    <a:lnB cap="flat" cmpd="sng" w="38100">
+                      <a:solidFill>
+                        <a:srgbClr val="FFFFFF"/>
+                      </a:solidFill>
+                      <a:prstDash val="solid"/>
+                      <a:round/>
+                      <a:headEnd len="sm" w="sm" type="none"/>
+                      <a:tailEnd len="sm" w="sm" type="none"/>
+                    </a:lnB>
+                  </a:tcPr>
+                </a:tc>
+              </a:tr>
+              <a:tr h="750575">
+                <a:tc>
+                  <a:txBody>
+                    <a:bodyPr/>
+                    <a:lstStyle/>
+                    <a:p>
+                      <a:pPr indent="0" lvl="0" marL="0" marR="0" rtl="0" algn="l">
+                        <a:spcBef>
+                          <a:spcPts val="0"/>
+                        </a:spcBef>
+                        <a:spcAft>
+                          <a:spcPts val="0"/>
+                        </a:spcAft>
+                        <a:buClr>
+                          <a:srgbClr val="000000"/>
                         </a:buClr>
                         <a:buSzPts val="1000"/>
                         <a:buFont typeface="Times New Roman"/>
@@ -24650,7 +26704,44 @@
                       </a:endParaRPr>
                     </a:p>
                   </a:txBody>
-                  <a:tcPr marT="45725" marB="45725" marR="91450" marL="91450"/>
+                  <a:tcPr marT="45725" marB="45725" marR="91450" marL="91450">
+                    <a:lnL cap="flat" cmpd="sng" w="12700">
+                      <a:solidFill>
+                        <a:srgbClr val="FFFFFF"/>
+                      </a:solidFill>
+                      <a:prstDash val="solid"/>
+                      <a:round/>
+                      <a:headEnd len="sm" w="sm" type="none"/>
+                      <a:tailEnd len="sm" w="sm" type="none"/>
+                    </a:lnL>
+                    <a:lnR cap="flat" cmpd="sng" w="12700">
+                      <a:solidFill>
+                        <a:srgbClr val="FFFFFF"/>
+                      </a:solidFill>
+                      <a:prstDash val="solid"/>
+                      <a:round/>
+                      <a:headEnd len="sm" w="sm" type="none"/>
+                      <a:tailEnd len="sm" w="sm" type="none"/>
+                    </a:lnR>
+                    <a:lnT cap="flat" cmpd="sng" w="38100">
+                      <a:solidFill>
+                        <a:srgbClr val="FFFFFF"/>
+                      </a:solidFill>
+                      <a:prstDash val="solid"/>
+                      <a:round/>
+                      <a:headEnd len="sm" w="sm" type="none"/>
+                      <a:tailEnd len="sm" w="sm" type="none"/>
+                    </a:lnT>
+                    <a:lnB cap="flat" cmpd="sng" w="12700">
+                      <a:solidFill>
+                        <a:srgbClr val="FFFFFF"/>
+                      </a:solidFill>
+                      <a:prstDash val="solid"/>
+                      <a:round/>
+                      <a:headEnd len="sm" w="sm" type="none"/>
+                      <a:tailEnd len="sm" w="sm" type="none"/>
+                    </a:lnB>
+                  </a:tcPr>
                 </a:tc>
                 <a:tc>
                   <a:txBody>
@@ -24665,7 +26756,7 @@
                           <a:spcPts val="0"/>
                         </a:spcAft>
                         <a:buClr>
-                          <a:schemeClr val="dk1"/>
+                          <a:srgbClr val="000000"/>
                         </a:buClr>
                         <a:buSzPts val="1000"/>
                         <a:buFont typeface="Times New Roman"/>
@@ -24688,7 +26779,44 @@
                       </a:endParaRPr>
                     </a:p>
                   </a:txBody>
-                  <a:tcPr marT="45725" marB="45725" marR="91450" marL="91450"/>
+                  <a:tcPr marT="45725" marB="45725" marR="91450" marL="91450">
+                    <a:lnL cap="flat" cmpd="sng" w="12700">
+                      <a:solidFill>
+                        <a:srgbClr val="FFFFFF"/>
+                      </a:solidFill>
+                      <a:prstDash val="solid"/>
+                      <a:round/>
+                      <a:headEnd len="sm" w="sm" type="none"/>
+                      <a:tailEnd len="sm" w="sm" type="none"/>
+                    </a:lnL>
+                    <a:lnR cap="flat" cmpd="sng" w="12700">
+                      <a:solidFill>
+                        <a:srgbClr val="FFFFFF"/>
+                      </a:solidFill>
+                      <a:prstDash val="solid"/>
+                      <a:round/>
+                      <a:headEnd len="sm" w="sm" type="none"/>
+                      <a:tailEnd len="sm" w="sm" type="none"/>
+                    </a:lnR>
+                    <a:lnT cap="flat" cmpd="sng" w="38100">
+                      <a:solidFill>
+                        <a:srgbClr val="FFFFFF"/>
+                      </a:solidFill>
+                      <a:prstDash val="solid"/>
+                      <a:round/>
+                      <a:headEnd len="sm" w="sm" type="none"/>
+                      <a:tailEnd len="sm" w="sm" type="none"/>
+                    </a:lnT>
+                    <a:lnB cap="flat" cmpd="sng" w="12700">
+                      <a:solidFill>
+                        <a:srgbClr val="FFFFFF"/>
+                      </a:solidFill>
+                      <a:prstDash val="solid"/>
+                      <a:round/>
+                      <a:headEnd len="sm" w="sm" type="none"/>
+                      <a:tailEnd len="sm" w="sm" type="none"/>
+                    </a:lnB>
+                  </a:tcPr>
                 </a:tc>
                 <a:tc>
                   <a:txBody>
@@ -24703,7 +26831,7 @@
                           <a:spcPts val="0"/>
                         </a:spcAft>
                         <a:buClr>
-                          <a:schemeClr val="dk1"/>
+                          <a:srgbClr val="000000"/>
                         </a:buClr>
                         <a:buSzPts val="1000"/>
                         <a:buFont typeface="Times New Roman"/>
@@ -24726,7 +26854,44 @@
                       </a:endParaRPr>
                     </a:p>
                   </a:txBody>
-                  <a:tcPr marT="45725" marB="45725" marR="91450" marL="91450"/>
+                  <a:tcPr marT="45725" marB="45725" marR="91450" marL="91450">
+                    <a:lnL cap="flat" cmpd="sng" w="12700">
+                      <a:solidFill>
+                        <a:srgbClr val="FFFFFF"/>
+                      </a:solidFill>
+                      <a:prstDash val="solid"/>
+                      <a:round/>
+                      <a:headEnd len="sm" w="sm" type="none"/>
+                      <a:tailEnd len="sm" w="sm" type="none"/>
+                    </a:lnL>
+                    <a:lnR cap="flat" cmpd="sng" w="12700">
+                      <a:solidFill>
+                        <a:srgbClr val="FFFFFF"/>
+                      </a:solidFill>
+                      <a:prstDash val="solid"/>
+                      <a:round/>
+                      <a:headEnd len="sm" w="sm" type="none"/>
+                      <a:tailEnd len="sm" w="sm" type="none"/>
+                    </a:lnR>
+                    <a:lnT cap="flat" cmpd="sng" w="38100">
+                      <a:solidFill>
+                        <a:srgbClr val="FFFFFF"/>
+                      </a:solidFill>
+                      <a:prstDash val="solid"/>
+                      <a:round/>
+                      <a:headEnd len="sm" w="sm" type="none"/>
+                      <a:tailEnd len="sm" w="sm" type="none"/>
+                    </a:lnT>
+                    <a:lnB cap="flat" cmpd="sng" w="12700">
+                      <a:solidFill>
+                        <a:srgbClr val="FFFFFF"/>
+                      </a:solidFill>
+                      <a:prstDash val="solid"/>
+                      <a:round/>
+                      <a:headEnd len="sm" w="sm" type="none"/>
+                      <a:tailEnd len="sm" w="sm" type="none"/>
+                    </a:lnB>
+                  </a:tcPr>
                 </a:tc>
                 <a:tc>
                   <a:txBody>
@@ -24741,7 +26906,7 @@
                           <a:spcPts val="0"/>
                         </a:spcAft>
                         <a:buClr>
-                          <a:schemeClr val="dk1"/>
+                          <a:srgbClr val="000000"/>
                         </a:buClr>
                         <a:buSzPts val="1000"/>
                         <a:buFont typeface="Times New Roman"/>
@@ -24764,7 +26929,44 @@
                       </a:endParaRPr>
                     </a:p>
                   </a:txBody>
-                  <a:tcPr marT="45725" marB="45725" marR="91450" marL="91450"/>
+                  <a:tcPr marT="45725" marB="45725" marR="91450" marL="91450">
+                    <a:lnL cap="flat" cmpd="sng" w="12700">
+                      <a:solidFill>
+                        <a:srgbClr val="FFFFFF"/>
+                      </a:solidFill>
+                      <a:prstDash val="solid"/>
+                      <a:round/>
+                      <a:headEnd len="sm" w="sm" type="none"/>
+                      <a:tailEnd len="sm" w="sm" type="none"/>
+                    </a:lnL>
+                    <a:lnR cap="flat" cmpd="sng" w="12700">
+                      <a:solidFill>
+                        <a:srgbClr val="FFFFFF"/>
+                      </a:solidFill>
+                      <a:prstDash val="solid"/>
+                      <a:round/>
+                      <a:headEnd len="sm" w="sm" type="none"/>
+                      <a:tailEnd len="sm" w="sm" type="none"/>
+                    </a:lnR>
+                    <a:lnT cap="flat" cmpd="sng" w="38100">
+                      <a:solidFill>
+                        <a:srgbClr val="FFFFFF"/>
+                      </a:solidFill>
+                      <a:prstDash val="solid"/>
+                      <a:round/>
+                      <a:headEnd len="sm" w="sm" type="none"/>
+                      <a:tailEnd len="sm" w="sm" type="none"/>
+                    </a:lnT>
+                    <a:lnB cap="flat" cmpd="sng" w="12700">
+                      <a:solidFill>
+                        <a:srgbClr val="FFFFFF"/>
+                      </a:solidFill>
+                      <a:prstDash val="solid"/>
+                      <a:round/>
+                      <a:headEnd len="sm" w="sm" type="none"/>
+                      <a:tailEnd len="sm" w="sm" type="none"/>
+                    </a:lnB>
+                  </a:tcPr>
                 </a:tc>
                 <a:tc>
                   <a:txBody>
@@ -24779,7 +26981,7 @@
                           <a:spcPts val="0"/>
                         </a:spcAft>
                         <a:buClr>
-                          <a:schemeClr val="dk1"/>
+                          <a:srgbClr val="000000"/>
                         </a:buClr>
                         <a:buSzPts val="1000"/>
                         <a:buFont typeface="Times New Roman"/>
@@ -24802,391 +27004,44 @@
                       </a:endParaRPr>
                     </a:p>
                   </a:txBody>
-                  <a:tcPr marT="45725" marB="45725" marR="91450" marL="91450"/>
-                </a:tc>
-              </a:tr>
-              <a:tr h="751200">
-                <a:tc>
-                  <a:txBody>
-                    <a:bodyPr/>
-                    <a:lstStyle/>
-                    <a:p>
-                      <a:pPr indent="0" lvl="0" marL="0" marR="0" rtl="0" algn="l">
-                        <a:spcBef>
-                          <a:spcPts val="0"/>
-                        </a:spcBef>
-                        <a:spcAft>
-                          <a:spcPts val="0"/>
-                        </a:spcAft>
-                        <a:buClr>
-                          <a:schemeClr val="dk1"/>
-                        </a:buClr>
-                        <a:buSzPts val="1000"/>
-                        <a:buFont typeface="Times New Roman"/>
-                        <a:buNone/>
-                      </a:pPr>
-                      <a:r>
-                        <a:rPr b="0" lang="en" sz="1000" u="none" cap="none" strike="noStrike">
-                          <a:latin typeface="Times New Roman"/>
-                          <a:ea typeface="Times New Roman"/>
-                          <a:cs typeface="Times New Roman"/>
-                          <a:sym typeface="Times New Roman"/>
-                        </a:rPr>
-                        <a:t>Kim et al. (2025)</a:t>
-                      </a:r>
-                      <a:endParaRPr b="0" sz="1000" u="none" cap="none" strike="noStrike">
-                        <a:latin typeface="Times New Roman"/>
-                        <a:ea typeface="Times New Roman"/>
-                        <a:cs typeface="Times New Roman"/>
-                        <a:sym typeface="Times New Roman"/>
-                      </a:endParaRPr>
-                    </a:p>
-                  </a:txBody>
-                  <a:tcPr marT="45725" marB="45725" marR="91450" marL="91450"/>
-                </a:tc>
-                <a:tc>
-                  <a:txBody>
-                    <a:bodyPr/>
-                    <a:lstStyle/>
-                    <a:p>
-                      <a:pPr indent="0" lvl="0" marL="0" marR="0" rtl="0" algn="l">
-                        <a:spcBef>
-                          <a:spcPts val="0"/>
-                        </a:spcBef>
-                        <a:spcAft>
-                          <a:spcPts val="0"/>
-                        </a:spcAft>
-                        <a:buClr>
-                          <a:schemeClr val="dk1"/>
-                        </a:buClr>
-                        <a:buSzPts val="1000"/>
-                        <a:buFont typeface="Times New Roman"/>
-                        <a:buNone/>
-                      </a:pPr>
-                      <a:r>
-                        <a:rPr b="0" lang="en" sz="1000" u="none" cap="none" strike="noStrike">
-                          <a:latin typeface="Times New Roman"/>
-                          <a:ea typeface="Times New Roman"/>
-                          <a:cs typeface="Times New Roman"/>
-                          <a:sym typeface="Times New Roman"/>
-                        </a:rPr>
-                        <a:t>Reinforcement learning (RL) based context generator to infer contextual signals from user prompts.</a:t>
-                      </a:r>
-                      <a:endParaRPr b="0" sz="1000" u="none" cap="none" strike="noStrike">
-                        <a:latin typeface="Times New Roman"/>
-                        <a:ea typeface="Times New Roman"/>
-                        <a:cs typeface="Times New Roman"/>
-                        <a:sym typeface="Times New Roman"/>
-                      </a:endParaRPr>
-                    </a:p>
-                  </a:txBody>
-                  <a:tcPr marT="45725" marB="45725" marR="91450" marL="91450"/>
-                </a:tc>
-                <a:tc>
-                  <a:txBody>
-                    <a:bodyPr/>
-                    <a:lstStyle/>
-                    <a:p>
-                      <a:pPr indent="0" lvl="0" marL="0" marR="0" rtl="0" algn="l">
-                        <a:spcBef>
-                          <a:spcPts val="0"/>
-                        </a:spcBef>
-                        <a:spcAft>
-                          <a:spcPts val="0"/>
-                        </a:spcAft>
-                        <a:buClr>
-                          <a:schemeClr val="dk1"/>
-                        </a:buClr>
-                        <a:buSzPts val="1000"/>
-                        <a:buFont typeface="Times New Roman"/>
-                        <a:buNone/>
-                      </a:pPr>
-                      <a:r>
-                        <a:rPr b="0" lang="en" sz="1000" u="none" cap="none" strike="noStrike">
-                          <a:latin typeface="Times New Roman"/>
-                          <a:ea typeface="Times New Roman"/>
-                          <a:cs typeface="Times New Roman"/>
-                          <a:sym typeface="Times New Roman"/>
-                        </a:rPr>
-                        <a:t>SafetyInstruct, Advbench, Wildjailbreak, XSTest.</a:t>
-                      </a:r>
-                      <a:endParaRPr b="0" sz="1000" u="none" cap="none" strike="noStrike">
-                        <a:latin typeface="Times New Roman"/>
-                        <a:ea typeface="Times New Roman"/>
-                        <a:cs typeface="Times New Roman"/>
-                        <a:sym typeface="Times New Roman"/>
-                      </a:endParaRPr>
-                    </a:p>
-                  </a:txBody>
-                  <a:tcPr marT="45725" marB="45725" marR="91450" marL="91450"/>
-                </a:tc>
-                <a:tc>
-                  <a:txBody>
-                    <a:bodyPr/>
-                    <a:lstStyle/>
-                    <a:p>
-                      <a:pPr indent="0" lvl="0" marL="0" marR="0" rtl="0" algn="l">
-                        <a:spcBef>
-                          <a:spcPts val="0"/>
-                        </a:spcBef>
-                        <a:spcAft>
-                          <a:spcPts val="0"/>
-                        </a:spcAft>
-                        <a:buClr>
-                          <a:schemeClr val="dk1"/>
-                        </a:buClr>
-                        <a:buSzPts val="1000"/>
-                        <a:buFont typeface="Times New Roman"/>
-                        <a:buNone/>
-                      </a:pPr>
-                      <a:r>
-                        <a:rPr b="0" lang="en" sz="1000" u="none" cap="none" strike="noStrike">
-                          <a:latin typeface="Times New Roman"/>
-                          <a:ea typeface="Times New Roman"/>
-                          <a:cs typeface="Times New Roman"/>
-                          <a:sym typeface="Times New Roman"/>
-                        </a:rPr>
-                        <a:t>Reduces harmful responses while preventing unnecessary refusals of benign requests.</a:t>
-                      </a:r>
-                      <a:endParaRPr b="0" sz="1000" u="none" cap="none" strike="noStrike">
-                        <a:latin typeface="Times New Roman"/>
-                        <a:ea typeface="Times New Roman"/>
-                        <a:cs typeface="Times New Roman"/>
-                        <a:sym typeface="Times New Roman"/>
-                      </a:endParaRPr>
-                    </a:p>
-                  </a:txBody>
-                  <a:tcPr marT="45725" marB="45725" marR="91450" marL="91450"/>
-                </a:tc>
-                <a:tc>
-                  <a:txBody>
-                    <a:bodyPr/>
-                    <a:lstStyle/>
-                    <a:p>
-                      <a:pPr indent="0" lvl="0" marL="0" marR="0" rtl="0" algn="l">
-                        <a:spcBef>
-                          <a:spcPts val="0"/>
-                        </a:spcBef>
-                        <a:spcAft>
-                          <a:spcPts val="0"/>
-                        </a:spcAft>
-                        <a:buClr>
-                          <a:schemeClr val="dk1"/>
-                        </a:buClr>
-                        <a:buSzPts val="1000"/>
-                        <a:buFont typeface="Times New Roman"/>
-                        <a:buNone/>
-                      </a:pPr>
-                      <a:r>
-                        <a:rPr b="0" lang="en" sz="1000" u="none" cap="none" strike="noStrike">
-                          <a:latin typeface="Times New Roman"/>
-                          <a:ea typeface="Times New Roman"/>
-                          <a:cs typeface="Times New Roman"/>
-                          <a:sym typeface="Times New Roman"/>
-                        </a:rPr>
-                        <a:t>Conventional LLM frameworks fail on ambiguous tasks; extracting context is necessary to prevent bypassing safeguards.</a:t>
-                      </a:r>
-                      <a:endParaRPr b="0" sz="1000" u="none" cap="none" strike="noStrike">
-                        <a:latin typeface="Times New Roman"/>
-                        <a:ea typeface="Times New Roman"/>
-                        <a:cs typeface="Times New Roman"/>
-                        <a:sym typeface="Times New Roman"/>
-                      </a:endParaRPr>
-                    </a:p>
-                  </a:txBody>
-                  <a:tcPr marT="45725" marB="45725" marR="91450" marL="91450"/>
-                </a:tc>
-              </a:tr>
-              <a:tr h="750575">
-                <a:tc>
-                  <a:txBody>
-                    <a:bodyPr/>
-                    <a:lstStyle/>
-                    <a:p>
-                      <a:pPr indent="0" lvl="0" marL="0" marR="0" rtl="0" algn="l">
-                        <a:spcBef>
-                          <a:spcPts val="0"/>
-                        </a:spcBef>
-                        <a:spcAft>
-                          <a:spcPts val="0"/>
-                        </a:spcAft>
-                        <a:buClr>
-                          <a:schemeClr val="dk1"/>
-                        </a:buClr>
-                        <a:buSzPts val="1000"/>
-                        <a:buFont typeface="Times New Roman"/>
-                        <a:buNone/>
-                      </a:pPr>
-                      <a:r>
-                        <a:rPr b="0" lang="en" sz="1000" u="none" cap="none" strike="noStrike">
-                          <a:latin typeface="Times New Roman"/>
-                          <a:ea typeface="Times New Roman"/>
-                          <a:cs typeface="Times New Roman"/>
-                          <a:sym typeface="Times New Roman"/>
-                        </a:rPr>
-                        <a:t>Schwarz (2025)</a:t>
-                      </a:r>
-                      <a:endParaRPr b="0" sz="1000" u="none" cap="none" strike="noStrike">
-                        <a:latin typeface="Times New Roman"/>
-                        <a:ea typeface="Times New Roman"/>
-                        <a:cs typeface="Times New Roman"/>
-                        <a:sym typeface="Times New Roman"/>
-                      </a:endParaRPr>
-                    </a:p>
-                  </a:txBody>
-                  <a:tcPr marT="45725" marB="45725" marR="91450" marL="91450"/>
-                </a:tc>
-                <a:tc>
-                  <a:txBody>
-                    <a:bodyPr/>
-                    <a:lstStyle/>
-                    <a:p>
-                      <a:pPr indent="0" lvl="0" marL="0" marR="0" rtl="0" algn="l">
-                        <a:spcBef>
-                          <a:spcPts val="0"/>
-                        </a:spcBef>
-                        <a:spcAft>
-                          <a:spcPts val="0"/>
-                        </a:spcAft>
-                        <a:buClr>
-                          <a:schemeClr val="dk1"/>
-                        </a:buClr>
-                        <a:buSzPts val="1000"/>
-                        <a:buFont typeface="Times New Roman"/>
-                        <a:buNone/>
-                      </a:pPr>
-                      <a:r>
-                        <a:rPr b="0" lang="en" sz="1000" u="none" cap="none" strike="noStrike">
-                          <a:latin typeface="Times New Roman"/>
-                          <a:ea typeface="Times New Roman"/>
-                          <a:cs typeface="Times New Roman"/>
-                          <a:sym typeface="Times New Roman"/>
-                        </a:rPr>
-                        <a:t>"Countermind" multi-layered security architecture using Semantic Boundary Logic (SBL) and Parameter-Space Restriction (PSR).</a:t>
-                      </a:r>
-                      <a:endParaRPr b="0" sz="1000" u="none" cap="none" strike="noStrike">
-                        <a:latin typeface="Times New Roman"/>
-                        <a:ea typeface="Times New Roman"/>
-                        <a:cs typeface="Times New Roman"/>
-                        <a:sym typeface="Times New Roman"/>
-                      </a:endParaRPr>
-                    </a:p>
-                  </a:txBody>
-                  <a:tcPr marT="45725" marB="45725" marR="91450" marL="91450"/>
-                </a:tc>
-                <a:tc>
-                  <a:txBody>
-                    <a:bodyPr/>
-                    <a:lstStyle/>
-                    <a:p>
-                      <a:pPr indent="0" lvl="0" marL="0" marR="0" rtl="0" algn="l">
-                        <a:spcBef>
-                          <a:spcPts val="0"/>
-                        </a:spcBef>
-                        <a:spcAft>
-                          <a:spcPts val="0"/>
-                        </a:spcAft>
-                        <a:buClr>
-                          <a:schemeClr val="dk1"/>
-                        </a:buClr>
-                        <a:buSzPts val="1000"/>
-                        <a:buFont typeface="Times New Roman"/>
-                        <a:buNone/>
-                      </a:pPr>
-                      <a:r>
-                        <a:rPr b="0" lang="en" sz="1000" u="none" cap="none" strike="noStrike">
-                          <a:latin typeface="Times New Roman"/>
-                          <a:ea typeface="Times New Roman"/>
-                          <a:cs typeface="Times New Roman"/>
-                          <a:sym typeface="Times New Roman"/>
-                        </a:rPr>
-                        <a:t>N/A (Conceptual/Architectural design).</a:t>
-                      </a:r>
-                      <a:endParaRPr b="0" sz="1000" u="none" cap="none" strike="noStrike">
-                        <a:latin typeface="Times New Roman"/>
-                        <a:ea typeface="Times New Roman"/>
-                        <a:cs typeface="Times New Roman"/>
-                        <a:sym typeface="Times New Roman"/>
-                      </a:endParaRPr>
-                    </a:p>
-                  </a:txBody>
-                  <a:tcPr marT="45725" marB="45725" marR="91450" marL="91450"/>
-                </a:tc>
-                <a:tc>
-                  <a:txBody>
-                    <a:bodyPr/>
-                    <a:lstStyle/>
-                    <a:p>
-                      <a:pPr indent="0" lvl="0" marL="0" marR="0" rtl="0" algn="l">
-                        <a:spcBef>
-                          <a:spcPts val="0"/>
-                        </a:spcBef>
-                        <a:spcAft>
-                          <a:spcPts val="0"/>
-                        </a:spcAft>
-                        <a:buClr>
-                          <a:schemeClr val="dk1"/>
-                        </a:buClr>
-                        <a:buSzPts val="1000"/>
-                        <a:buFont typeface="Times New Roman"/>
-                        <a:buNone/>
-                      </a:pPr>
-                      <a:r>
-                        <a:rPr b="0" lang="en" sz="1000" u="none" cap="none" strike="noStrike">
-                          <a:latin typeface="Times New Roman"/>
-                          <a:ea typeface="Times New Roman"/>
-                          <a:cs typeface="Times New Roman"/>
-                          <a:sym typeface="Times New Roman"/>
-                        </a:rPr>
-                        <a:t>Shifts LLM defenses from reactive post-hoc filtering to proactive pre-inference structural validation.</a:t>
-                      </a:r>
-                      <a:endParaRPr b="0" sz="1000" u="none" cap="none" strike="noStrike">
-                        <a:latin typeface="Times New Roman"/>
-                        <a:ea typeface="Times New Roman"/>
-                        <a:cs typeface="Times New Roman"/>
-                        <a:sym typeface="Times New Roman"/>
-                      </a:endParaRPr>
-                    </a:p>
-                  </a:txBody>
-                  <a:tcPr marT="45725" marB="45725" marR="91450" marL="91450"/>
-                </a:tc>
-                <a:tc>
-                  <a:txBody>
-                    <a:bodyPr/>
-                    <a:lstStyle/>
-                    <a:p>
-                      <a:pPr indent="0" lvl="0" marL="0" marR="0" rtl="0" algn="l">
-                        <a:spcBef>
-                          <a:spcPts val="0"/>
-                        </a:spcBef>
-                        <a:spcAft>
-                          <a:spcPts val="0"/>
-                        </a:spcAft>
-                        <a:buClr>
-                          <a:schemeClr val="dk1"/>
-                        </a:buClr>
-                        <a:buSzPts val="1000"/>
-                        <a:buFont typeface="Times New Roman"/>
-                        <a:buNone/>
-                      </a:pPr>
-                      <a:r>
-                        <a:rPr b="0" lang="en" sz="1000" u="none" cap="none" strike="noStrike">
-                          <a:latin typeface="Times New Roman"/>
-                          <a:ea typeface="Times New Roman"/>
-                          <a:cs typeface="Times New Roman"/>
-                          <a:sym typeface="Times New Roman"/>
-                        </a:rPr>
-                        <a:t>Post-hoc filters are brittle against prompt injections; models inherently struggle to distinguish trusted instructions from untrusted data.</a:t>
-                      </a:r>
-                      <a:endParaRPr b="0" sz="1000" u="none" cap="none" strike="noStrike">
-                        <a:latin typeface="Times New Roman"/>
-                        <a:ea typeface="Times New Roman"/>
-                        <a:cs typeface="Times New Roman"/>
-                        <a:sym typeface="Times New Roman"/>
-                      </a:endParaRPr>
-                    </a:p>
-                  </a:txBody>
-                  <a:tcPr marT="45725" marB="45725" marR="91450" marL="91450"/>
+                  <a:tcPr marT="45725" marB="45725" marR="91450" marL="91450">
+                    <a:lnL cap="flat" cmpd="sng" w="12700">
+                      <a:solidFill>
+                        <a:srgbClr val="FFFFFF"/>
+                      </a:solidFill>
+                      <a:prstDash val="solid"/>
+                      <a:round/>
+                      <a:headEnd len="sm" w="sm" type="none"/>
+                      <a:tailEnd len="sm" w="sm" type="none"/>
+                    </a:lnL>
+                    <a:lnR cap="flat" cmpd="sng" w="12700">
+                      <a:solidFill>
+                        <a:srgbClr val="FFFFFF"/>
+                      </a:solidFill>
+                      <a:prstDash val="solid"/>
+                      <a:round/>
+                      <a:headEnd len="sm" w="sm" type="none"/>
+                      <a:tailEnd len="sm" w="sm" type="none"/>
+                    </a:lnR>
+                    <a:lnT cap="flat" cmpd="sng" w="38100">
+                      <a:solidFill>
+                        <a:srgbClr val="FFFFFF"/>
+                      </a:solidFill>
+                      <a:prstDash val="solid"/>
+                      <a:round/>
+                      <a:headEnd len="sm" w="sm" type="none"/>
+                      <a:tailEnd len="sm" w="sm" type="none"/>
+                    </a:lnT>
+                    <a:lnB cap="flat" cmpd="sng" w="12700">
+                      <a:solidFill>
+                        <a:srgbClr val="FFFFFF"/>
+                      </a:solidFill>
+                      <a:prstDash val="solid"/>
+                      <a:round/>
+                      <a:headEnd len="sm" w="sm" type="none"/>
+                      <a:tailEnd len="sm" w="sm" type="none"/>
+                    </a:lnB>
+                  </a:tcPr>
                 </a:tc>
               </a:tr>
             </a:tbl>

--- a/SEM_8/FRP/FRP Mid Term.pptx
+++ b/SEM_8/FRP/FRP Mid Term.pptx
@@ -22935,7 +22935,7 @@
           <p:nvPr/>
         </p:nvGraphicFramePr>
         <p:xfrm>
-          <a:off x="342900" y="1201590"/>
+          <a:off x="342900" y="1142990"/>
           <a:ext cx="3000000" cy="3000000"/>
         </p:xfrm>
         <a:graphic>
@@ -22943,7 +22943,7 @@
             <a:tbl>
               <a:tblPr bandRow="1" firstRow="1">
                 <a:noFill/>
-                <a:tableStyleId>{6D9ABEBF-9BBF-4B88-B93A-B9F46CAE2BA6}</a:tableStyleId>
+                <a:tableStyleId>{79E7AAB4-3E1F-45FC-A883-02254338B797}</a:tableStyleId>
               </a:tblPr>
               <a:tblGrid>
                 <a:gridCol w="872025"/>
@@ -25111,7 +25111,7 @@
           <p:nvPr/>
         </p:nvGraphicFramePr>
         <p:xfrm>
-          <a:off x="342900" y="1095305"/>
+          <a:off x="342900" y="1143005"/>
           <a:ext cx="3000000" cy="3000000"/>
         </p:xfrm>
         <a:graphic>
@@ -25119,7 +25119,7 @@
             <a:tbl>
               <a:tblPr bandRow="1" firstRow="1">
                 <a:noFill/>
-                <a:tableStyleId>{6D9ABEBF-9BBF-4B88-B93A-B9F46CAE2BA6}</a:tableStyleId>
+                <a:tableStyleId>{79E7AAB4-3E1F-45FC-A883-02254338B797}</a:tableStyleId>
               </a:tblPr>
               <a:tblGrid>
                 <a:gridCol w="872025"/>
@@ -26317,7 +26317,7 @@
                           <a:cs typeface="Times New Roman"/>
                           <a:sym typeface="Times New Roman"/>
                         </a:rPr>
-                        <a:t>Dozono et al. (2025)</a:t>
+                        <a:t>Guo et al. (2023)</a:t>
                       </a:r>
                       <a:endParaRPr b="0" sz="1000" u="none" cap="none" strike="noStrike">
                         <a:latin typeface="Times New Roman"/>
@@ -26392,7 +26392,7 @@
                           <a:cs typeface="Times New Roman"/>
                           <a:sym typeface="Times New Roman"/>
                         </a:rPr>
-                        <a:t>Empirical evaluation of 5 frontier LLMs comparing open-source vs. closed-source code performance.</a:t>
+                        <a:t>Systematic review of 130 false positive mitigation studies across 5 technical categories.</a:t>
                       </a:r>
                       <a:endParaRPr b="0" sz="1000" u="none" cap="none" strike="noStrike">
                         <a:latin typeface="Times New Roman"/>
@@ -26467,7 +26467,7 @@
                           <a:cs typeface="Times New Roman"/>
                           <a:sym typeface="Times New Roman"/>
                         </a:rPr>
-                        <a:t>CWE-Bench-Java (Open) and TS-Vuls (Closed, commercial Teamscale codebase).</a:t>
+                        <a:t>N/A (Literature Review).</a:t>
                       </a:r>
                       <a:endParaRPr b="0" sz="1000" u="none" cap="none" strike="noStrike">
                         <a:latin typeface="Times New Roman"/>
@@ -26542,7 +26542,7 @@
                           <a:cs typeface="Times New Roman"/>
                           <a:sym typeface="Times New Roman"/>
                         </a:rPr>
-                        <a:t>Precision dropped significantly from 56% on open-source code to 34% on closed-source code.</a:t>
+                        <a:t>Established a taxonomy for false positive mitigation and identified deep learning and NLP as future directions.</a:t>
                       </a:r>
                       <a:endParaRPr b="0" sz="1000" u="none" cap="none" strike="noStrike">
                         <a:latin typeface="Times New Roman"/>
@@ -26617,7 +26617,7 @@
                           <a:cs typeface="Times New Roman"/>
                           <a:sym typeface="Times New Roman"/>
                         </a:rPr>
-                        <a:t>LLM metrics are heavily inflated on open-source data due to training contamination.</a:t>
+                        <a:t>Current approaches suffer from low explainability, ambiguous concept definitions, and dataset biases.</a:t>
                       </a:r>
                       <a:endParaRPr b="0" sz="1000" u="none" cap="none" strike="noStrike">
                         <a:latin typeface="Times New Roman"/>
